--- a/Project Phase-I -0th Review-1 PPT ALTERED.pptx
+++ b/Project Phase-I -0th Review-1 PPT ALTERED.pptx
@@ -5,36 +5,39 @@
     <p:sldMasterId id="2147483648" r:id="rId1"/>
   </p:sldMasterIdLst>
   <p:notesMasterIdLst>
-    <p:notesMasterId r:id="rId12"/>
+    <p:notesMasterId r:id="rId15"/>
   </p:notesMasterIdLst>
   <p:sldIdLst>
     <p:sldId id="256" r:id="rId2"/>
     <p:sldId id="257" r:id="rId3"/>
     <p:sldId id="258" r:id="rId4"/>
     <p:sldId id="259" r:id="rId5"/>
-    <p:sldId id="260" r:id="rId6"/>
-    <p:sldId id="261" r:id="rId7"/>
-    <p:sldId id="262" r:id="rId8"/>
-    <p:sldId id="265" r:id="rId9"/>
-    <p:sldId id="266" r:id="rId10"/>
-    <p:sldId id="269" r:id="rId11"/>
+    <p:sldId id="271" r:id="rId6"/>
+    <p:sldId id="270" r:id="rId7"/>
+    <p:sldId id="272" r:id="rId8"/>
+    <p:sldId id="260" r:id="rId9"/>
+    <p:sldId id="261" r:id="rId10"/>
+    <p:sldId id="262" r:id="rId11"/>
+    <p:sldId id="265" r:id="rId12"/>
+    <p:sldId id="266" r:id="rId13"/>
+    <p:sldId id="269" r:id="rId14"/>
   </p:sldIdLst>
   <p:sldSz cx="12192000" cy="6858000"/>
   <p:notesSz cx="6858000" cy="9144000"/>
   <p:embeddedFontLst>
     <p:embeddedFont>
       <p:font typeface="Book Antiqua" panose="02040602050305030304" pitchFamily="18" charset="0"/>
-      <p:regular r:id="rId13"/>
-      <p:bold r:id="rId14"/>
-      <p:italic r:id="rId15"/>
-      <p:boldItalic r:id="rId16"/>
+      <p:regular r:id="rId16"/>
+      <p:bold r:id="rId17"/>
+      <p:italic r:id="rId18"/>
+      <p:boldItalic r:id="rId19"/>
     </p:embeddedFont>
     <p:embeddedFont>
       <p:font typeface="Georgia" panose="02040502050405020303" pitchFamily="18" charset="0"/>
-      <p:regular r:id="rId17"/>
-      <p:bold r:id="rId18"/>
-      <p:italic r:id="rId19"/>
-      <p:boldItalic r:id="rId20"/>
+      <p:regular r:id="rId20"/>
+      <p:bold r:id="rId21"/>
+      <p:italic r:id="rId22"/>
+      <p:boldItalic r:id="rId23"/>
     </p:embeddedFont>
   </p:embeddedFontLst>
   <p:defaultTextStyle>
@@ -282,7 +285,7 @@
       </p15:sldGuideLst>
     </p:ext>
     <p:ext uri="GoogleSlidesCustomDataVersion2">
-      <go:slidesCustomData xmlns:go="http://customooxmlschemas.google.com/" xmlns:ahyp="http://schemas.microsoft.com/office/drawing/2018/hyperlinkcolor" xmlns:p15="http://schemas.microsoft.com/office/powerpoint/2012/main" xmlns:p14="http://schemas.microsoft.com/office/powerpoint/2010/main" xmlns:com="http://schemas.openxmlformats.org/drawingml/2006/compatibility" xmlns:pvml="urn:schemas-microsoft-com:office:powerpoint" xmlns:v="urn:schemas-microsoft-com:vml" xmlns:o="urn:schemas-microsoft-com:office:office" xmlns:dgm="http://schemas.openxmlformats.org/drawingml/2006/diagram" xmlns:c="http://schemas.openxmlformats.org/drawingml/2006/chart" xmlns:mv="urn:schemas-microsoft-com:mac:vml" xmlns:mc="http://schemas.openxmlformats.org/markup-compatibility/2006" xmlns="" r:id="rId30" roundtripDataSignature="AMtx7mjqlVfWdu2U9ZrtiM122pZXgd/Bzg=="/>
+      <go:slidesCustomData xmlns="" xmlns:mc="http://schemas.openxmlformats.org/markup-compatibility/2006" xmlns:mv="urn:schemas-microsoft-com:mac:vml" xmlns:c="http://schemas.openxmlformats.org/drawingml/2006/chart" xmlns:dgm="http://schemas.openxmlformats.org/drawingml/2006/diagram" xmlns:o="urn:schemas-microsoft-com:office:office" xmlns:v="urn:schemas-microsoft-com:vml" xmlns:pvml="urn:schemas-microsoft-com:office:powerpoint" xmlns:com="http://schemas.openxmlformats.org/drawingml/2006/compatibility" xmlns:p14="http://schemas.microsoft.com/office/powerpoint/2010/main" xmlns:p15="http://schemas.microsoft.com/office/powerpoint/2012/main" xmlns:ahyp="http://schemas.microsoft.com/office/drawing/2018/hyperlinkcolor" xmlns:go="http://customooxmlschemas.google.com/" r:id="rId30" roundtripDataSignature="AMtx7mjqlVfWdu2U9ZrtiM122pZXgd/Bzg=="/>
     </p:ext>
   </p:extLst>
 </p:presentation>
@@ -291,9 +294,132 @@
 <file path=ppt/revisionInfo.xml><?xml version="1.0" encoding="utf-8"?>
 <p1510:revInfo xmlns:a="http://schemas.openxmlformats.org/drawingml/2006/main" xmlns:r="http://schemas.openxmlformats.org/officeDocument/2006/relationships" xmlns:p1510="http://schemas.microsoft.com/office/powerpoint/2015/10/main">
   <p1510:revLst>
-    <p1510:client id="{B52D1A86-093A-4512-976E-FBDAAB31D635}" v="1" dt="2026-09-09T05:20:15.201"/>
+    <p1510:client id="{E62883BE-9F36-4D2C-BAB1-6E44DEDD3EA5}" v="2" dt="2026-10-14T06:08:42.282"/>
   </p1510:revLst>
 </p1510:revInfo>
+</file>
+
+<file path=ppt/changesInfos/changesInfo1.xml><?xml version="1.0" encoding="utf-8"?>
+<pc:chgInfo xmlns:a="http://schemas.openxmlformats.org/drawingml/2006/main" xmlns:r="http://schemas.openxmlformats.org/officeDocument/2006/relationships" xmlns:ac="http://schemas.microsoft.com/office/drawing/2013/main/command" xmlns:pc="http://schemas.microsoft.com/office/powerpoint/2013/main/command">
+  <pc:docChgLst>
+    <pc:chgData name="LEKHA MOL" userId="47059ce5aa6ea3c7" providerId="LiveId" clId="{2B0AA82E-2A44-4B05-941A-A84F581B91A2}"/>
+    <pc:docChg chg="custSel addSld modSld sldOrd">
+      <pc:chgData name="LEKHA MOL" userId="47059ce5aa6ea3c7" providerId="LiveId" clId="{2B0AA82E-2A44-4B05-941A-A84F581B91A2}" dt="2026-10-14T06:12:27.001" v="76"/>
+      <pc:docMkLst>
+        <pc:docMk/>
+      </pc:docMkLst>
+      <pc:sldChg chg="addSp delSp modSp new mod ord">
+        <pc:chgData name="LEKHA MOL" userId="47059ce5aa6ea3c7" providerId="LiveId" clId="{2B0AA82E-2A44-4B05-941A-A84F581B91A2}" dt="2026-10-14T06:12:27.001" v="76"/>
+        <pc:sldMkLst>
+          <pc:docMk/>
+          <pc:sldMk cId="1058519529" sldId="270"/>
+        </pc:sldMkLst>
+        <pc:spChg chg="add">
+          <ac:chgData name="LEKHA MOL" userId="47059ce5aa6ea3c7" providerId="LiveId" clId="{2B0AA82E-2A44-4B05-941A-A84F581B91A2}" dt="2026-10-14T05:54:24.486" v="3" actId="22"/>
+          <ac:spMkLst>
+            <pc:docMk/>
+            <pc:sldMk cId="1058519529" sldId="270"/>
+            <ac:spMk id="3" creationId="{E8379BE1-B4BA-B2E7-5037-20CD353C7CDC}"/>
+          </ac:spMkLst>
+        </pc:spChg>
+        <pc:spChg chg="add">
+          <ac:chgData name="LEKHA MOL" userId="47059ce5aa6ea3c7" providerId="LiveId" clId="{2B0AA82E-2A44-4B05-941A-A84F581B91A2}" dt="2026-10-14T05:54:36.566" v="4" actId="22"/>
+          <ac:spMkLst>
+            <pc:docMk/>
+            <pc:sldMk cId="1058519529" sldId="270"/>
+            <ac:spMk id="5" creationId="{57357BB5-3838-278B-63B9-3B688738BE6E}"/>
+          </ac:spMkLst>
+        </pc:spChg>
+        <pc:spChg chg="add del">
+          <ac:chgData name="LEKHA MOL" userId="47059ce5aa6ea3c7" providerId="LiveId" clId="{2B0AA82E-2A44-4B05-941A-A84F581B91A2}" dt="2026-10-14T05:54:51.078" v="6" actId="478"/>
+          <ac:spMkLst>
+            <pc:docMk/>
+            <pc:sldMk cId="1058519529" sldId="270"/>
+            <ac:spMk id="7" creationId="{5DDF6A53-0C0B-A4AE-04AE-C935A8782261}"/>
+          </ac:spMkLst>
+        </pc:spChg>
+        <pc:spChg chg="add del mod">
+          <ac:chgData name="LEKHA MOL" userId="47059ce5aa6ea3c7" providerId="LiveId" clId="{2B0AA82E-2A44-4B05-941A-A84F581B91A2}" dt="2026-10-14T06:10:01.963" v="68"/>
+          <ac:spMkLst>
+            <pc:docMk/>
+            <pc:sldMk cId="1058519529" sldId="270"/>
+            <ac:spMk id="9" creationId="{80436013-B90D-6974-C58C-5B20029BC566}"/>
+          </ac:spMkLst>
+        </pc:spChg>
+        <pc:spChg chg="add mod">
+          <ac:chgData name="LEKHA MOL" userId="47059ce5aa6ea3c7" providerId="LiveId" clId="{2B0AA82E-2A44-4B05-941A-A84F581B91A2}" dt="2026-10-14T06:04:13.194" v="61" actId="1076"/>
+          <ac:spMkLst>
+            <pc:docMk/>
+            <pc:sldMk cId="1058519529" sldId="270"/>
+            <ac:spMk id="11" creationId="{26535DBE-B1CE-BE28-F69B-DCC04A0F9D46}"/>
+          </ac:spMkLst>
+        </pc:spChg>
+        <pc:picChg chg="add mod">
+          <ac:chgData name="LEKHA MOL" userId="47059ce5aa6ea3c7" providerId="LiveId" clId="{2B0AA82E-2A44-4B05-941A-A84F581B91A2}" dt="2026-10-14T06:08:52.895" v="66" actId="14100"/>
+          <ac:picMkLst>
+            <pc:docMk/>
+            <pc:sldMk cId="1058519529" sldId="270"/>
+            <ac:picMk id="12" creationId="{CC09D5E9-528A-D616-449C-706100C6B379}"/>
+          </ac:picMkLst>
+        </pc:picChg>
+      </pc:sldChg>
+      <pc:sldChg chg="addSp modSp add mod">
+        <pc:chgData name="LEKHA MOL" userId="47059ce5aa6ea3c7" providerId="LiveId" clId="{2B0AA82E-2A44-4B05-941A-A84F581B91A2}" dt="2026-10-14T06:00:41.274" v="55" actId="12"/>
+        <pc:sldMkLst>
+          <pc:docMk/>
+          <pc:sldMk cId="638394914" sldId="271"/>
+        </pc:sldMkLst>
+        <pc:spChg chg="add mod">
+          <ac:chgData name="LEKHA MOL" userId="47059ce5aa6ea3c7" providerId="LiveId" clId="{2B0AA82E-2A44-4B05-941A-A84F581B91A2}" dt="2026-10-14T05:57:14.143" v="42" actId="14100"/>
+          <ac:spMkLst>
+            <pc:docMk/>
+            <pc:sldMk cId="638394914" sldId="271"/>
+            <ac:spMk id="4" creationId="{43E73485-6B24-893E-072A-DB0DA21176CE}"/>
+          </ac:spMkLst>
+        </pc:spChg>
+        <pc:spChg chg="add mod">
+          <ac:chgData name="LEKHA MOL" userId="47059ce5aa6ea3c7" providerId="LiveId" clId="{2B0AA82E-2A44-4B05-941A-A84F581B91A2}" dt="2026-10-14T06:00:41.274" v="55" actId="12"/>
+          <ac:spMkLst>
+            <pc:docMk/>
+            <pc:sldMk cId="638394914" sldId="271"/>
+            <ac:spMk id="7" creationId="{9DD67002-3F5C-E1E7-5DD2-F3CEF0507F1C}"/>
+          </ac:spMkLst>
+        </pc:spChg>
+      </pc:sldChg>
+      <pc:sldChg chg="addSp modSp new mod">
+        <pc:chgData name="LEKHA MOL" userId="47059ce5aa6ea3c7" providerId="LiveId" clId="{2B0AA82E-2A44-4B05-941A-A84F581B91A2}" dt="2026-10-14T06:12:18.714" v="74" actId="14100"/>
+        <pc:sldMkLst>
+          <pc:docMk/>
+          <pc:sldMk cId="3380060394" sldId="272"/>
+        </pc:sldMkLst>
+        <pc:spChg chg="add">
+          <ac:chgData name="LEKHA MOL" userId="47059ce5aa6ea3c7" providerId="LiveId" clId="{2B0AA82E-2A44-4B05-941A-A84F581B91A2}" dt="2026-10-14T06:10:11.226" v="70" actId="22"/>
+          <ac:spMkLst>
+            <pc:docMk/>
+            <pc:sldMk cId="3380060394" sldId="272"/>
+            <ac:spMk id="3" creationId="{2D988CDC-CCE5-E499-E0E6-50FE0276D10A}"/>
+          </ac:spMkLst>
+        </pc:spChg>
+        <pc:spChg chg="add">
+          <ac:chgData name="LEKHA MOL" userId="47059ce5aa6ea3c7" providerId="LiveId" clId="{2B0AA82E-2A44-4B05-941A-A84F581B91A2}" dt="2026-10-14T06:10:23.455" v="71" actId="22"/>
+          <ac:spMkLst>
+            <pc:docMk/>
+            <pc:sldMk cId="3380060394" sldId="272"/>
+            <ac:spMk id="5" creationId="{0A496429-6CEE-5E24-0936-E47BDF6F61DC}"/>
+          </ac:spMkLst>
+        </pc:spChg>
+        <pc:picChg chg="add mod">
+          <ac:chgData name="LEKHA MOL" userId="47059ce5aa6ea3c7" providerId="LiveId" clId="{2B0AA82E-2A44-4B05-941A-A84F581B91A2}" dt="2026-10-14T06:12:18.714" v="74" actId="14100"/>
+          <ac:picMkLst>
+            <pc:docMk/>
+            <pc:sldMk cId="3380060394" sldId="272"/>
+            <ac:picMk id="7" creationId="{9B18C123-3B80-FD6C-9A1B-BB146AE99717}"/>
+          </ac:picMkLst>
+        </pc:picChg>
+      </pc:sldChg>
+    </pc:docChg>
+  </pc:docChgLst>
+</pc:chgInfo>
 </file>
 
 <file path=ppt/notesMasters/notesMaster1.xml><?xml version="1.0" encoding="utf-8"?>
@@ -16424,6 +16550,1541 @@
 </file>
 
 <file path=ppt/slides/slide10.xml><?xml version="1.0" encoding="utf-8"?>
+<p:sld xmlns:a="http://schemas.openxmlformats.org/drawingml/2006/main" xmlns:r="http://schemas.openxmlformats.org/officeDocument/2006/relationships" xmlns:p="http://schemas.openxmlformats.org/presentationml/2006/main">
+  <p:cSld>
+    <p:spTree>
+      <p:nvGrpSpPr>
+        <p:cNvPr id="1" name="Shape 150"/>
+        <p:cNvGrpSpPr/>
+        <p:nvPr/>
+      </p:nvGrpSpPr>
+      <p:grpSpPr>
+        <a:xfrm>
+          <a:off x="0" y="0"/>
+          <a:ext cx="0" cy="0"/>
+          <a:chOff x="0" y="0"/>
+          <a:chExt cx="0" cy="0"/>
+        </a:xfrm>
+      </p:grpSpPr>
+      <p:sp>
+        <p:nvSpPr>
+          <p:cNvPr id="151" name="Google Shape;151;p7"/>
+          <p:cNvSpPr txBox="1"/>
+          <p:nvPr/>
+        </p:nvSpPr>
+        <p:spPr>
+          <a:xfrm>
+            <a:off x="0" y="6632575"/>
+            <a:ext cx="12192000" cy="225425"/>
+          </a:xfrm>
+          <a:prstGeom prst="rect">
+            <a:avLst/>
+          </a:prstGeom>
+          <a:solidFill>
+            <a:srgbClr val="381850"/>
+          </a:solidFill>
+          <a:ln>
+            <a:noFill/>
+          </a:ln>
+        </p:spPr>
+        <p:txBody>
+          <a:bodyPr spcFirstLastPara="1" wrap="square" lIns="91425" tIns="45700" rIns="91425" bIns="45700" anchor="ctr" anchorCtr="0">
+            <a:noAutofit/>
+          </a:bodyPr>
+          <a:lstStyle/>
+          <a:p>
+            <a:pPr marL="0" marR="0" lvl="0" indent="0" algn="l" rtl="0">
+              <a:lnSpc>
+                <a:spcPct val="100000"/>
+              </a:lnSpc>
+              <a:spcBef>
+                <a:spcPts val="0"/>
+              </a:spcBef>
+              <a:spcAft>
+                <a:spcPts val="0"/>
+              </a:spcAft>
+              <a:buNone/>
+            </a:pPr>
+            <a:endParaRPr sz="1800" b="0" i="0" u="none">
+              <a:solidFill>
+                <a:schemeClr val="dk1"/>
+              </a:solidFill>
+              <a:latin typeface="Arial"/>
+              <a:ea typeface="Arial"/>
+              <a:cs typeface="Arial"/>
+              <a:sym typeface="Arial"/>
+            </a:endParaRPr>
+          </a:p>
+        </p:txBody>
+      </p:sp>
+      <p:sp>
+        <p:nvSpPr>
+          <p:cNvPr id="152" name="Google Shape;152;p7"/>
+          <p:cNvSpPr txBox="1"/>
+          <p:nvPr/>
+        </p:nvSpPr>
+        <p:spPr>
+          <a:xfrm>
+            <a:off x="3509962" y="-6350"/>
+            <a:ext cx="5172075" cy="128587"/>
+          </a:xfrm>
+          <a:prstGeom prst="rect">
+            <a:avLst/>
+          </a:prstGeom>
+          <a:solidFill>
+            <a:srgbClr val="381850"/>
+          </a:solidFill>
+          <a:ln>
+            <a:noFill/>
+          </a:ln>
+        </p:spPr>
+        <p:txBody>
+          <a:bodyPr spcFirstLastPara="1" wrap="square" lIns="91425" tIns="45700" rIns="91425" bIns="45700" anchor="ctr" anchorCtr="0">
+            <a:noAutofit/>
+          </a:bodyPr>
+          <a:lstStyle/>
+          <a:p>
+            <a:pPr marL="0" marR="0" lvl="0" indent="0" algn="l" rtl="0">
+              <a:lnSpc>
+                <a:spcPct val="100000"/>
+              </a:lnSpc>
+              <a:spcBef>
+                <a:spcPts val="0"/>
+              </a:spcBef>
+              <a:spcAft>
+                <a:spcPts val="0"/>
+              </a:spcAft>
+              <a:buNone/>
+            </a:pPr>
+            <a:endParaRPr sz="1800" b="0" i="0" u="none">
+              <a:solidFill>
+                <a:schemeClr val="dk1"/>
+              </a:solidFill>
+              <a:latin typeface="Arial"/>
+              <a:ea typeface="Arial"/>
+              <a:cs typeface="Arial"/>
+              <a:sym typeface="Arial"/>
+            </a:endParaRPr>
+          </a:p>
+        </p:txBody>
+      </p:sp>
+      <p:sp>
+        <p:nvSpPr>
+          <p:cNvPr id="153" name="Google Shape;153;p7"/>
+          <p:cNvSpPr txBox="1"/>
+          <p:nvPr/>
+        </p:nvSpPr>
+        <p:spPr>
+          <a:xfrm>
+            <a:off x="992187" y="382587"/>
+            <a:ext cx="10207625" cy="584200"/>
+          </a:xfrm>
+          <a:prstGeom prst="rect">
+            <a:avLst/>
+          </a:prstGeom>
+          <a:noFill/>
+          <a:ln>
+            <a:noFill/>
+          </a:ln>
+        </p:spPr>
+        <p:txBody>
+          <a:bodyPr spcFirstLastPara="1" wrap="square" lIns="91425" tIns="45700" rIns="91425" bIns="45700" anchor="t" anchorCtr="0">
+            <a:spAutoFit/>
+          </a:bodyPr>
+          <a:lstStyle/>
+          <a:p>
+            <a:pPr marL="0" marR="0" lvl="0" indent="0" algn="ctr" rtl="0">
+              <a:lnSpc>
+                <a:spcPct val="100000"/>
+              </a:lnSpc>
+              <a:spcBef>
+                <a:spcPts val="0"/>
+              </a:spcBef>
+              <a:spcAft>
+                <a:spcPts val="0"/>
+              </a:spcAft>
+              <a:buClr>
+                <a:schemeClr val="dk1"/>
+              </a:buClr>
+              <a:buSzPts val="3200"/>
+              <a:buFont typeface="Georgia"/>
+              <a:buNone/>
+            </a:pPr>
+            <a:r>
+              <a:rPr lang="en-US" sz="3200" b="0" i="0" u="none">
+                <a:solidFill>
+                  <a:schemeClr val="dk1"/>
+                </a:solidFill>
+                <a:latin typeface="Georgia"/>
+                <a:ea typeface="Georgia"/>
+                <a:cs typeface="Georgia"/>
+                <a:sym typeface="Georgia"/>
+              </a:rPr>
+              <a:t>LITERATURE REVIEW….</a:t>
+            </a:r>
+            <a:endParaRPr/>
+          </a:p>
+        </p:txBody>
+      </p:sp>
+      <p:graphicFrame>
+        <p:nvGraphicFramePr>
+          <p:cNvPr id="154" name="Google Shape;154;p7"/>
+          <p:cNvGraphicFramePr/>
+          <p:nvPr>
+            <p:extLst>
+              <p:ext uri="{D42A27DB-BD31-4B8C-83A1-F6EECF244321}">
+                <p14:modId xmlns:p14="http://schemas.microsoft.com/office/powerpoint/2010/main" val="431874334"/>
+              </p:ext>
+            </p:extLst>
+          </p:nvPr>
+        </p:nvGraphicFramePr>
+        <p:xfrm>
+          <a:off x="996950" y="1330325"/>
+          <a:ext cx="10585450" cy="4824400"/>
+        </p:xfrm>
+        <a:graphic>
+          <a:graphicData uri="http://schemas.openxmlformats.org/drawingml/2006/table">
+            <a:tbl>
+              <a:tblPr>
+                <a:noFill/>
+                <a:tableStyleId>{7F5DC531-3BBC-4B7F-937C-E1510FDDE53F}</a:tableStyleId>
+              </a:tblPr>
+              <a:tblGrid>
+                <a:gridCol w="755650">
+                  <a:extLst>
+                    <a:ext uri="{9D8B030D-6E8A-4147-A177-3AD203B41FA5}">
+                      <a16:colId xmlns:a16="http://schemas.microsoft.com/office/drawing/2014/main" val="20000"/>
+                    </a:ext>
+                  </a:extLst>
+                </a:gridCol>
+                <a:gridCol w="5353050">
+                  <a:extLst>
+                    <a:ext uri="{9D8B030D-6E8A-4147-A177-3AD203B41FA5}">
+                      <a16:colId xmlns:a16="http://schemas.microsoft.com/office/drawing/2014/main" val="20001"/>
+                    </a:ext>
+                  </a:extLst>
+                </a:gridCol>
+                <a:gridCol w="4476750">
+                  <a:extLst>
+                    <a:ext uri="{9D8B030D-6E8A-4147-A177-3AD203B41FA5}">
+                      <a16:colId xmlns:a16="http://schemas.microsoft.com/office/drawing/2014/main" val="20002"/>
+                    </a:ext>
+                  </a:extLst>
+                </a:gridCol>
+              </a:tblGrid>
+              <a:tr h="1076325">
+                <a:tc>
+                  <a:txBody>
+                    <a:bodyPr/>
+                    <a:lstStyle/>
+                    <a:p>
+                      <a:pPr marL="0" marR="0" lvl="0" indent="0" algn="ctr" rtl="0">
+                        <a:lnSpc>
+                          <a:spcPct val="100000"/>
+                        </a:lnSpc>
+                        <a:spcBef>
+                          <a:spcPts val="0"/>
+                        </a:spcBef>
+                        <a:spcAft>
+                          <a:spcPts val="0"/>
+                        </a:spcAft>
+                        <a:buClr>
+                          <a:schemeClr val="dk1"/>
+                        </a:buClr>
+                        <a:buSzPts val="1800"/>
+                        <a:buFont typeface="Calibri"/>
+                        <a:buNone/>
+                      </a:pPr>
+                      <a:endParaRPr sz="1800" b="1" i="0" u="none">
+                        <a:solidFill>
+                          <a:srgbClr val="FFFFFF"/>
+                        </a:solidFill>
+                        <a:latin typeface="Calibri"/>
+                        <a:ea typeface="Calibri"/>
+                        <a:cs typeface="Calibri"/>
+                        <a:sym typeface="Calibri"/>
+                      </a:endParaRPr>
+                    </a:p>
+                    <a:p>
+                      <a:pPr marL="0" marR="0" lvl="0" indent="0" algn="ctr" rtl="0">
+                        <a:lnSpc>
+                          <a:spcPct val="100000"/>
+                        </a:lnSpc>
+                        <a:spcBef>
+                          <a:spcPts val="0"/>
+                        </a:spcBef>
+                        <a:spcAft>
+                          <a:spcPts val="0"/>
+                        </a:spcAft>
+                        <a:buClr>
+                          <a:srgbClr val="FFFFFF"/>
+                        </a:buClr>
+                        <a:buSzPts val="1800"/>
+                        <a:buFont typeface="Calibri"/>
+                        <a:buNone/>
+                      </a:pPr>
+                      <a:r>
+                        <a:rPr lang="en-US" sz="1800" b="1" i="0" u="none">
+                          <a:solidFill>
+                            <a:srgbClr val="FFFFFF"/>
+                          </a:solidFill>
+                          <a:latin typeface="Calibri"/>
+                          <a:ea typeface="Calibri"/>
+                          <a:cs typeface="Calibri"/>
+                          <a:sym typeface="Calibri"/>
+                        </a:rPr>
+                        <a:t>S.No</a:t>
+                      </a:r>
+                      <a:endParaRPr/>
+                    </a:p>
+                  </a:txBody>
+                  <a:tcPr marL="91450" marR="91450" marT="45725" marB="45725">
+                    <a:lnL w="12700" cap="flat" cmpd="sng">
+                      <a:solidFill>
+                        <a:schemeClr val="lt1"/>
+                      </a:solidFill>
+                      <a:prstDash val="solid"/>
+                      <a:round/>
+                      <a:headEnd type="none" w="sm" len="sm"/>
+                      <a:tailEnd type="none" w="sm" len="sm"/>
+                    </a:lnL>
+                    <a:lnR w="12700" cap="flat" cmpd="sng">
+                      <a:solidFill>
+                        <a:schemeClr val="lt1"/>
+                      </a:solidFill>
+                      <a:prstDash val="solid"/>
+                      <a:round/>
+                      <a:headEnd type="none" w="sm" len="sm"/>
+                      <a:tailEnd type="none" w="sm" len="sm"/>
+                    </a:lnR>
+                    <a:lnT w="12700" cap="flat" cmpd="sng">
+                      <a:solidFill>
+                        <a:schemeClr val="lt1"/>
+                      </a:solidFill>
+                      <a:prstDash val="solid"/>
+                      <a:round/>
+                      <a:headEnd type="none" w="sm" len="sm"/>
+                      <a:tailEnd type="none" w="sm" len="sm"/>
+                    </a:lnT>
+                    <a:lnB w="38100" cap="flat" cmpd="sng">
+                      <a:solidFill>
+                        <a:schemeClr val="lt1"/>
+                      </a:solidFill>
+                      <a:prstDash val="solid"/>
+                      <a:round/>
+                      <a:headEnd type="none" w="sm" len="sm"/>
+                      <a:tailEnd type="none" w="sm" len="sm"/>
+                    </a:lnB>
+                    <a:solidFill>
+                      <a:schemeClr val="accent1"/>
+                    </a:solidFill>
+                  </a:tcPr>
+                </a:tc>
+                <a:tc>
+                  <a:txBody>
+                    <a:bodyPr/>
+                    <a:lstStyle/>
+                    <a:p>
+                      <a:pPr marL="0" marR="0" lvl="0" indent="0" algn="ctr" rtl="0">
+                        <a:lnSpc>
+                          <a:spcPct val="100000"/>
+                        </a:lnSpc>
+                        <a:spcBef>
+                          <a:spcPts val="0"/>
+                        </a:spcBef>
+                        <a:spcAft>
+                          <a:spcPts val="0"/>
+                        </a:spcAft>
+                        <a:buClr>
+                          <a:schemeClr val="dk1"/>
+                        </a:buClr>
+                        <a:buSzPts val="1800"/>
+                        <a:buFont typeface="Calibri"/>
+                        <a:buNone/>
+                      </a:pPr>
+                      <a:endParaRPr sz="1800" b="1" i="0" u="none">
+                        <a:solidFill>
+                          <a:srgbClr val="FFFFFF"/>
+                        </a:solidFill>
+                        <a:latin typeface="Calibri"/>
+                        <a:ea typeface="Calibri"/>
+                        <a:cs typeface="Calibri"/>
+                        <a:sym typeface="Calibri"/>
+                      </a:endParaRPr>
+                    </a:p>
+                    <a:p>
+                      <a:pPr marL="0" marR="0" lvl="0" indent="0" algn="ctr" rtl="0">
+                        <a:lnSpc>
+                          <a:spcPct val="100000"/>
+                        </a:lnSpc>
+                        <a:spcBef>
+                          <a:spcPts val="0"/>
+                        </a:spcBef>
+                        <a:spcAft>
+                          <a:spcPts val="0"/>
+                        </a:spcAft>
+                        <a:buClr>
+                          <a:srgbClr val="FFFFFF"/>
+                        </a:buClr>
+                        <a:buSzPts val="1800"/>
+                        <a:buFont typeface="Calibri"/>
+                        <a:buNone/>
+                      </a:pPr>
+                      <a:r>
+                        <a:rPr lang="en-US" sz="1800" b="1" i="0" u="none">
+                          <a:solidFill>
+                            <a:srgbClr val="FFFFFF"/>
+                          </a:solidFill>
+                          <a:latin typeface="Calibri"/>
+                          <a:ea typeface="Calibri"/>
+                          <a:cs typeface="Calibri"/>
+                          <a:sym typeface="Calibri"/>
+                        </a:rPr>
+                        <a:t>ARTICLE TITLE &amp; PUBLICATION DETAIL</a:t>
+                      </a:r>
+                      <a:endParaRPr/>
+                    </a:p>
+                  </a:txBody>
+                  <a:tcPr marL="91450" marR="91450" marT="45725" marB="45725">
+                    <a:lnL w="12700" cap="flat" cmpd="sng">
+                      <a:solidFill>
+                        <a:schemeClr val="lt1"/>
+                      </a:solidFill>
+                      <a:prstDash val="solid"/>
+                      <a:round/>
+                      <a:headEnd type="none" w="sm" len="sm"/>
+                      <a:tailEnd type="none" w="sm" len="sm"/>
+                    </a:lnL>
+                    <a:lnR w="12700" cap="flat" cmpd="sng">
+                      <a:solidFill>
+                        <a:schemeClr val="lt1"/>
+                      </a:solidFill>
+                      <a:prstDash val="solid"/>
+                      <a:round/>
+                      <a:headEnd type="none" w="sm" len="sm"/>
+                      <a:tailEnd type="none" w="sm" len="sm"/>
+                    </a:lnR>
+                    <a:lnT w="12700" cap="flat" cmpd="sng">
+                      <a:solidFill>
+                        <a:schemeClr val="lt1"/>
+                      </a:solidFill>
+                      <a:prstDash val="solid"/>
+                      <a:round/>
+                      <a:headEnd type="none" w="sm" len="sm"/>
+                      <a:tailEnd type="none" w="sm" len="sm"/>
+                    </a:lnT>
+                    <a:lnB w="38100" cap="flat" cmpd="sng">
+                      <a:solidFill>
+                        <a:schemeClr val="lt1"/>
+                      </a:solidFill>
+                      <a:prstDash val="solid"/>
+                      <a:round/>
+                      <a:headEnd type="none" w="sm" len="sm"/>
+                      <a:tailEnd type="none" w="sm" len="sm"/>
+                    </a:lnB>
+                    <a:solidFill>
+                      <a:schemeClr val="accent1"/>
+                    </a:solidFill>
+                  </a:tcPr>
+                </a:tc>
+                <a:tc>
+                  <a:txBody>
+                    <a:bodyPr/>
+                    <a:lstStyle/>
+                    <a:p>
+                      <a:pPr marL="0" marR="0" lvl="0" indent="0" algn="ctr" rtl="0">
+                        <a:lnSpc>
+                          <a:spcPct val="100000"/>
+                        </a:lnSpc>
+                        <a:spcBef>
+                          <a:spcPts val="0"/>
+                        </a:spcBef>
+                        <a:spcAft>
+                          <a:spcPts val="0"/>
+                        </a:spcAft>
+                        <a:buClr>
+                          <a:schemeClr val="dk1"/>
+                        </a:buClr>
+                        <a:buSzPts val="1800"/>
+                        <a:buFont typeface="Calibri"/>
+                        <a:buNone/>
+                      </a:pPr>
+                      <a:endParaRPr sz="1800" b="1" i="0" u="none">
+                        <a:solidFill>
+                          <a:srgbClr val="FFFFFF"/>
+                        </a:solidFill>
+                        <a:latin typeface="Calibri"/>
+                        <a:ea typeface="Calibri"/>
+                        <a:cs typeface="Calibri"/>
+                        <a:sym typeface="Calibri"/>
+                      </a:endParaRPr>
+                    </a:p>
+                    <a:p>
+                      <a:pPr marL="0" marR="0" lvl="0" indent="0" algn="ctr" rtl="0">
+                        <a:lnSpc>
+                          <a:spcPct val="100000"/>
+                        </a:lnSpc>
+                        <a:spcBef>
+                          <a:spcPts val="0"/>
+                        </a:spcBef>
+                        <a:spcAft>
+                          <a:spcPts val="0"/>
+                        </a:spcAft>
+                        <a:buClr>
+                          <a:srgbClr val="FFFFFF"/>
+                        </a:buClr>
+                        <a:buSzPts val="1800"/>
+                        <a:buFont typeface="Calibri"/>
+                        <a:buNone/>
+                      </a:pPr>
+                      <a:r>
+                        <a:rPr lang="en-US" sz="1800" b="1" i="0" u="none">
+                          <a:solidFill>
+                            <a:srgbClr val="FFFFFF"/>
+                          </a:solidFill>
+                          <a:latin typeface="Calibri"/>
+                          <a:ea typeface="Calibri"/>
+                          <a:cs typeface="Calibri"/>
+                          <a:sym typeface="Calibri"/>
+                        </a:rPr>
+                        <a:t>METHODOLOGY USED</a:t>
+                      </a:r>
+                      <a:endParaRPr/>
+                    </a:p>
+                  </a:txBody>
+                  <a:tcPr marL="91450" marR="91450" marT="45725" marB="45725">
+                    <a:lnL w="12700" cap="flat" cmpd="sng">
+                      <a:solidFill>
+                        <a:schemeClr val="lt1"/>
+                      </a:solidFill>
+                      <a:prstDash val="solid"/>
+                      <a:round/>
+                      <a:headEnd type="none" w="sm" len="sm"/>
+                      <a:tailEnd type="none" w="sm" len="sm"/>
+                    </a:lnL>
+                    <a:lnR w="12700" cap="flat" cmpd="sng">
+                      <a:solidFill>
+                        <a:schemeClr val="lt1"/>
+                      </a:solidFill>
+                      <a:prstDash val="solid"/>
+                      <a:round/>
+                      <a:headEnd type="none" w="sm" len="sm"/>
+                      <a:tailEnd type="none" w="sm" len="sm"/>
+                    </a:lnR>
+                    <a:lnT w="12700" cap="flat" cmpd="sng">
+                      <a:solidFill>
+                        <a:schemeClr val="lt1"/>
+                      </a:solidFill>
+                      <a:prstDash val="solid"/>
+                      <a:round/>
+                      <a:headEnd type="none" w="sm" len="sm"/>
+                      <a:tailEnd type="none" w="sm" len="sm"/>
+                    </a:lnT>
+                    <a:lnB w="38100" cap="flat" cmpd="sng">
+                      <a:solidFill>
+                        <a:schemeClr val="lt1"/>
+                      </a:solidFill>
+                      <a:prstDash val="solid"/>
+                      <a:round/>
+                      <a:headEnd type="none" w="sm" len="sm"/>
+                      <a:tailEnd type="none" w="sm" len="sm"/>
+                    </a:lnB>
+                    <a:solidFill>
+                      <a:schemeClr val="accent1"/>
+                    </a:solidFill>
+                  </a:tcPr>
+                </a:tc>
+                <a:extLst>
+                  <a:ext uri="{0D108BD9-81ED-4DB2-BD59-A6C34878D82A}">
+                    <a16:rowId xmlns:a16="http://schemas.microsoft.com/office/drawing/2014/main" val="10000"/>
+                  </a:ext>
+                </a:extLst>
+              </a:tr>
+              <a:tr h="1462075">
+                <a:tc>
+                  <a:txBody>
+                    <a:bodyPr/>
+                    <a:lstStyle/>
+                    <a:p>
+                      <a:pPr marL="0" marR="0" lvl="0" indent="0" algn="l" rtl="0">
+                        <a:lnSpc>
+                          <a:spcPct val="100000"/>
+                        </a:lnSpc>
+                        <a:spcBef>
+                          <a:spcPts val="0"/>
+                        </a:spcBef>
+                        <a:spcAft>
+                          <a:spcPts val="0"/>
+                        </a:spcAft>
+                        <a:buClr>
+                          <a:srgbClr val="000000"/>
+                        </a:buClr>
+                        <a:buSzPts val="1800"/>
+                        <a:buFont typeface="Calibri"/>
+                        <a:buNone/>
+                      </a:pPr>
+                      <a:r>
+                        <a:rPr lang="en-US" sz="1800" b="0" i="0" u="none">
+                          <a:solidFill>
+                            <a:srgbClr val="000000"/>
+                          </a:solidFill>
+                          <a:latin typeface="Calibri"/>
+                          <a:ea typeface="Calibri"/>
+                          <a:cs typeface="Calibri"/>
+                          <a:sym typeface="Calibri"/>
+                        </a:rPr>
+                        <a:t>5</a:t>
+                      </a:r>
+                      <a:endParaRPr/>
+                    </a:p>
+                  </a:txBody>
+                  <a:tcPr marL="91450" marR="91450" marT="45725" marB="45725">
+                    <a:lnL w="12700" cap="flat" cmpd="sng">
+                      <a:solidFill>
+                        <a:schemeClr val="lt1"/>
+                      </a:solidFill>
+                      <a:prstDash val="solid"/>
+                      <a:round/>
+                      <a:headEnd type="none" w="sm" len="sm"/>
+                      <a:tailEnd type="none" w="sm" len="sm"/>
+                    </a:lnL>
+                    <a:lnR w="12700" cap="flat" cmpd="sng">
+                      <a:solidFill>
+                        <a:schemeClr val="lt1"/>
+                      </a:solidFill>
+                      <a:prstDash val="solid"/>
+                      <a:round/>
+                      <a:headEnd type="none" w="sm" len="sm"/>
+                      <a:tailEnd type="none" w="sm" len="sm"/>
+                    </a:lnR>
+                    <a:lnT w="38100" cap="flat" cmpd="sng">
+                      <a:solidFill>
+                        <a:schemeClr val="lt1"/>
+                      </a:solidFill>
+                      <a:prstDash val="solid"/>
+                      <a:round/>
+                      <a:headEnd type="none" w="sm" len="sm"/>
+                      <a:tailEnd type="none" w="sm" len="sm"/>
+                    </a:lnT>
+                    <a:lnB w="12700" cap="flat" cmpd="sng">
+                      <a:solidFill>
+                        <a:schemeClr val="lt1"/>
+                      </a:solidFill>
+                      <a:prstDash val="solid"/>
+                      <a:round/>
+                      <a:headEnd type="none" w="sm" len="sm"/>
+                      <a:tailEnd type="none" w="sm" len="sm"/>
+                    </a:lnB>
+                    <a:solidFill>
+                      <a:srgbClr val="FACED1"/>
+                    </a:solidFill>
+                  </a:tcPr>
+                </a:tc>
+                <a:tc>
+                  <a:txBody>
+                    <a:bodyPr/>
+                    <a:lstStyle/>
+                    <a:p>
+                      <a:pPr marL="0" marR="0" lvl="0" indent="0" algn="l" rtl="0">
+                        <a:spcBef>
+                          <a:spcPts val="0"/>
+                        </a:spcBef>
+                        <a:spcAft>
+                          <a:spcPts val="0"/>
+                        </a:spcAft>
+                        <a:buNone/>
+                      </a:pPr>
+                      <a:r>
+                        <a:rPr lang="en-IN" sz="2400" dirty="0"/>
+                        <a:t>Digital Twin-Based Fault Diagnosis and Predictive Maintenance for Industrial Systems</a:t>
+                      </a:r>
+                      <a:endParaRPr sz="2400" b="0" i="0" u="none" dirty="0">
+                        <a:solidFill>
+                          <a:srgbClr val="000000"/>
+                        </a:solidFill>
+                        <a:latin typeface="Calibri"/>
+                        <a:ea typeface="Calibri"/>
+                        <a:cs typeface="Calibri"/>
+                        <a:sym typeface="Calibri"/>
+                      </a:endParaRPr>
+                    </a:p>
+                  </a:txBody>
+                  <a:tcPr marL="91450" marR="91450" marT="45725" marB="45725">
+                    <a:lnL w="12700" cap="flat" cmpd="sng">
+                      <a:solidFill>
+                        <a:schemeClr val="lt1"/>
+                      </a:solidFill>
+                      <a:prstDash val="solid"/>
+                      <a:round/>
+                      <a:headEnd type="none" w="sm" len="sm"/>
+                      <a:tailEnd type="none" w="sm" len="sm"/>
+                    </a:lnL>
+                    <a:lnR w="12700" cap="flat" cmpd="sng">
+                      <a:solidFill>
+                        <a:schemeClr val="lt1"/>
+                      </a:solidFill>
+                      <a:prstDash val="solid"/>
+                      <a:round/>
+                      <a:headEnd type="none" w="sm" len="sm"/>
+                      <a:tailEnd type="none" w="sm" len="sm"/>
+                    </a:lnR>
+                    <a:lnT w="38100" cap="flat" cmpd="sng">
+                      <a:solidFill>
+                        <a:schemeClr val="lt1"/>
+                      </a:solidFill>
+                      <a:prstDash val="solid"/>
+                      <a:round/>
+                      <a:headEnd type="none" w="sm" len="sm"/>
+                      <a:tailEnd type="none" w="sm" len="sm"/>
+                    </a:lnT>
+                    <a:lnB w="12700" cap="flat" cmpd="sng">
+                      <a:solidFill>
+                        <a:schemeClr val="lt1"/>
+                      </a:solidFill>
+                      <a:prstDash val="solid"/>
+                      <a:round/>
+                      <a:headEnd type="none" w="sm" len="sm"/>
+                      <a:tailEnd type="none" w="sm" len="sm"/>
+                    </a:lnB>
+                    <a:solidFill>
+                      <a:srgbClr val="FACED1"/>
+                    </a:solidFill>
+                  </a:tcPr>
+                </a:tc>
+                <a:tc>
+                  <a:txBody>
+                    <a:bodyPr/>
+                    <a:lstStyle/>
+                    <a:p>
+                      <a:pPr marL="0" marR="0" lvl="0" indent="0" algn="l" rtl="0">
+                        <a:lnSpc>
+                          <a:spcPct val="100000"/>
+                        </a:lnSpc>
+                        <a:spcBef>
+                          <a:spcPts val="0"/>
+                        </a:spcBef>
+                        <a:spcAft>
+                          <a:spcPts val="0"/>
+                        </a:spcAft>
+                        <a:buClr>
+                          <a:srgbClr val="000000"/>
+                        </a:buClr>
+                        <a:buSzPts val="1800"/>
+                        <a:buFont typeface="Calibri"/>
+                        <a:buNone/>
+                      </a:pPr>
+                      <a:r>
+                        <a:rPr lang="en-IN" sz="2400" dirty="0"/>
+                        <a:t>Digital Twin, IoT sensors, real-time monitoring, predictive maintenance</a:t>
+                      </a:r>
+                      <a:endParaRPr sz="2400" dirty="0"/>
+                    </a:p>
+                  </a:txBody>
+                  <a:tcPr marL="91450" marR="91450" marT="45725" marB="45725">
+                    <a:lnL w="12700" cap="flat" cmpd="sng">
+                      <a:solidFill>
+                        <a:schemeClr val="lt1"/>
+                      </a:solidFill>
+                      <a:prstDash val="solid"/>
+                      <a:round/>
+                      <a:headEnd type="none" w="sm" len="sm"/>
+                      <a:tailEnd type="none" w="sm" len="sm"/>
+                    </a:lnL>
+                    <a:lnR w="12700" cap="flat" cmpd="sng">
+                      <a:solidFill>
+                        <a:schemeClr val="lt1"/>
+                      </a:solidFill>
+                      <a:prstDash val="solid"/>
+                      <a:round/>
+                      <a:headEnd type="none" w="sm" len="sm"/>
+                      <a:tailEnd type="none" w="sm" len="sm"/>
+                    </a:lnR>
+                    <a:lnT w="38100" cap="flat" cmpd="sng">
+                      <a:solidFill>
+                        <a:schemeClr val="lt1"/>
+                      </a:solidFill>
+                      <a:prstDash val="solid"/>
+                      <a:round/>
+                      <a:headEnd type="none" w="sm" len="sm"/>
+                      <a:tailEnd type="none" w="sm" len="sm"/>
+                    </a:lnT>
+                    <a:lnB w="12700" cap="flat" cmpd="sng">
+                      <a:solidFill>
+                        <a:schemeClr val="lt1"/>
+                      </a:solidFill>
+                      <a:prstDash val="solid"/>
+                      <a:round/>
+                      <a:headEnd type="none" w="sm" len="sm"/>
+                      <a:tailEnd type="none" w="sm" len="sm"/>
+                    </a:lnB>
+                    <a:solidFill>
+                      <a:srgbClr val="FACED1"/>
+                    </a:solidFill>
+                  </a:tcPr>
+                </a:tc>
+                <a:extLst>
+                  <a:ext uri="{0D108BD9-81ED-4DB2-BD59-A6C34878D82A}">
+                    <a16:rowId xmlns:a16="http://schemas.microsoft.com/office/drawing/2014/main" val="10001"/>
+                  </a:ext>
+                </a:extLst>
+              </a:tr>
+              <a:tr h="2286000">
+                <a:tc>
+                  <a:txBody>
+                    <a:bodyPr/>
+                    <a:lstStyle/>
+                    <a:p>
+                      <a:pPr marL="0" marR="0" lvl="0" indent="0" algn="l" rtl="0">
+                        <a:lnSpc>
+                          <a:spcPct val="100000"/>
+                        </a:lnSpc>
+                        <a:spcBef>
+                          <a:spcPts val="0"/>
+                        </a:spcBef>
+                        <a:spcAft>
+                          <a:spcPts val="0"/>
+                        </a:spcAft>
+                        <a:buClr>
+                          <a:srgbClr val="000000"/>
+                        </a:buClr>
+                        <a:buSzPts val="1800"/>
+                        <a:buFont typeface="Calibri"/>
+                        <a:buNone/>
+                      </a:pPr>
+                      <a:r>
+                        <a:rPr lang="en-US" sz="1800" b="0" i="0" u="none">
+                          <a:solidFill>
+                            <a:srgbClr val="000000"/>
+                          </a:solidFill>
+                          <a:latin typeface="Calibri"/>
+                          <a:ea typeface="Calibri"/>
+                          <a:cs typeface="Calibri"/>
+                          <a:sym typeface="Calibri"/>
+                        </a:rPr>
+                        <a:t>6</a:t>
+                      </a:r>
+                      <a:endParaRPr/>
+                    </a:p>
+                  </a:txBody>
+                  <a:tcPr marL="91450" marR="91450" marT="45725" marB="45725">
+                    <a:lnL w="12700" cap="flat" cmpd="sng">
+                      <a:solidFill>
+                        <a:schemeClr val="lt1"/>
+                      </a:solidFill>
+                      <a:prstDash val="solid"/>
+                      <a:round/>
+                      <a:headEnd type="none" w="sm" len="sm"/>
+                      <a:tailEnd type="none" w="sm" len="sm"/>
+                    </a:lnL>
+                    <a:lnR w="12700" cap="flat" cmpd="sng">
+                      <a:solidFill>
+                        <a:schemeClr val="lt1"/>
+                      </a:solidFill>
+                      <a:prstDash val="solid"/>
+                      <a:round/>
+                      <a:headEnd type="none" w="sm" len="sm"/>
+                      <a:tailEnd type="none" w="sm" len="sm"/>
+                    </a:lnR>
+                    <a:lnT w="12700" cap="flat" cmpd="sng">
+                      <a:solidFill>
+                        <a:schemeClr val="lt1"/>
+                      </a:solidFill>
+                      <a:prstDash val="solid"/>
+                      <a:round/>
+                      <a:headEnd type="none" w="sm" len="sm"/>
+                      <a:tailEnd type="none" w="sm" len="sm"/>
+                    </a:lnT>
+                    <a:lnB w="12700" cap="flat" cmpd="sng">
+                      <a:solidFill>
+                        <a:schemeClr val="lt1"/>
+                      </a:solidFill>
+                      <a:prstDash val="solid"/>
+                      <a:round/>
+                      <a:headEnd type="none" w="sm" len="sm"/>
+                      <a:tailEnd type="none" w="sm" len="sm"/>
+                    </a:lnB>
+                    <a:solidFill>
+                      <a:srgbClr val="FCE8EA"/>
+                    </a:solidFill>
+                  </a:tcPr>
+                </a:tc>
+                <a:tc>
+                  <a:txBody>
+                    <a:bodyPr/>
+                    <a:lstStyle/>
+                    <a:p>
+                      <a:pPr marL="0" marR="0" lvl="0" indent="0" algn="l" rtl="0">
+                        <a:spcBef>
+                          <a:spcPts val="0"/>
+                        </a:spcBef>
+                        <a:spcAft>
+                          <a:spcPts val="0"/>
+                        </a:spcAft>
+                        <a:buNone/>
+                      </a:pPr>
+                      <a:r>
+                        <a:rPr lang="en-IN" sz="2400" dirty="0"/>
+                        <a:t>AI-Based Intelligent Condition Monitoring of Elevator Systems</a:t>
+                      </a:r>
+                      <a:endParaRPr sz="2400" b="0" i="0" u="none" dirty="0">
+                        <a:solidFill>
+                          <a:srgbClr val="000000"/>
+                        </a:solidFill>
+                        <a:latin typeface="Calibri"/>
+                        <a:ea typeface="Calibri"/>
+                        <a:cs typeface="Calibri"/>
+                        <a:sym typeface="Calibri"/>
+                      </a:endParaRPr>
+                    </a:p>
+                  </a:txBody>
+                  <a:tcPr marL="91450" marR="91450" marT="45725" marB="45725">
+                    <a:lnL w="12700" cap="flat" cmpd="sng">
+                      <a:solidFill>
+                        <a:schemeClr val="lt1"/>
+                      </a:solidFill>
+                      <a:prstDash val="solid"/>
+                      <a:round/>
+                      <a:headEnd type="none" w="sm" len="sm"/>
+                      <a:tailEnd type="none" w="sm" len="sm"/>
+                    </a:lnL>
+                    <a:lnR w="12700" cap="flat" cmpd="sng">
+                      <a:solidFill>
+                        <a:schemeClr val="lt1"/>
+                      </a:solidFill>
+                      <a:prstDash val="solid"/>
+                      <a:round/>
+                      <a:headEnd type="none" w="sm" len="sm"/>
+                      <a:tailEnd type="none" w="sm" len="sm"/>
+                    </a:lnR>
+                    <a:lnT w="12700" cap="flat" cmpd="sng">
+                      <a:solidFill>
+                        <a:schemeClr val="lt1"/>
+                      </a:solidFill>
+                      <a:prstDash val="solid"/>
+                      <a:round/>
+                      <a:headEnd type="none" w="sm" len="sm"/>
+                      <a:tailEnd type="none" w="sm" len="sm"/>
+                    </a:lnT>
+                    <a:lnB w="12700" cap="flat" cmpd="sng">
+                      <a:solidFill>
+                        <a:schemeClr val="lt1"/>
+                      </a:solidFill>
+                      <a:prstDash val="solid"/>
+                      <a:round/>
+                      <a:headEnd type="none" w="sm" len="sm"/>
+                      <a:tailEnd type="none" w="sm" len="sm"/>
+                    </a:lnB>
+                    <a:solidFill>
+                      <a:srgbClr val="FCE8EA"/>
+                    </a:solidFill>
+                  </a:tcPr>
+                </a:tc>
+                <a:tc>
+                  <a:txBody>
+                    <a:bodyPr/>
+                    <a:lstStyle/>
+                    <a:p>
+                      <a:pPr marL="0" marR="0" lvl="0" indent="0" algn="l" rtl="0">
+                        <a:lnSpc>
+                          <a:spcPct val="100000"/>
+                        </a:lnSpc>
+                        <a:spcBef>
+                          <a:spcPts val="0"/>
+                        </a:spcBef>
+                        <a:spcAft>
+                          <a:spcPts val="0"/>
+                        </a:spcAft>
+                        <a:buClr>
+                          <a:srgbClr val="000000"/>
+                        </a:buClr>
+                        <a:buSzPts val="1800"/>
+                        <a:buFont typeface="Calibri"/>
+                        <a:buNone/>
+                      </a:pPr>
+                      <a:r>
+                        <a:rPr lang="en-IN" sz="2400" dirty="0"/>
+                        <a:t>Machine Learning, sensor data analysis, anomaly detection, condition monitoring</a:t>
+                      </a:r>
+                      <a:endParaRPr sz="2400" dirty="0"/>
+                    </a:p>
+                  </a:txBody>
+                  <a:tcPr marL="91450" marR="91450" marT="45725" marB="45725">
+                    <a:lnL w="12700" cap="flat" cmpd="sng">
+                      <a:solidFill>
+                        <a:schemeClr val="lt1"/>
+                      </a:solidFill>
+                      <a:prstDash val="solid"/>
+                      <a:round/>
+                      <a:headEnd type="none" w="sm" len="sm"/>
+                      <a:tailEnd type="none" w="sm" len="sm"/>
+                    </a:lnL>
+                    <a:lnR w="12700" cap="flat" cmpd="sng">
+                      <a:solidFill>
+                        <a:schemeClr val="lt1"/>
+                      </a:solidFill>
+                      <a:prstDash val="solid"/>
+                      <a:round/>
+                      <a:headEnd type="none" w="sm" len="sm"/>
+                      <a:tailEnd type="none" w="sm" len="sm"/>
+                    </a:lnR>
+                    <a:lnT w="12700" cap="flat" cmpd="sng">
+                      <a:solidFill>
+                        <a:schemeClr val="lt1"/>
+                      </a:solidFill>
+                      <a:prstDash val="solid"/>
+                      <a:round/>
+                      <a:headEnd type="none" w="sm" len="sm"/>
+                      <a:tailEnd type="none" w="sm" len="sm"/>
+                    </a:lnT>
+                    <a:lnB w="12700" cap="flat" cmpd="sng">
+                      <a:solidFill>
+                        <a:schemeClr val="lt1"/>
+                      </a:solidFill>
+                      <a:prstDash val="solid"/>
+                      <a:round/>
+                      <a:headEnd type="none" w="sm" len="sm"/>
+                      <a:tailEnd type="none" w="sm" len="sm"/>
+                    </a:lnB>
+                    <a:solidFill>
+                      <a:srgbClr val="FCE8EA"/>
+                    </a:solidFill>
+                  </a:tcPr>
+                </a:tc>
+                <a:extLst>
+                  <a:ext uri="{0D108BD9-81ED-4DB2-BD59-A6C34878D82A}">
+                    <a16:rowId xmlns:a16="http://schemas.microsoft.com/office/drawing/2014/main" val="10002"/>
+                  </a:ext>
+                </a:extLst>
+              </a:tr>
+            </a:tbl>
+          </a:graphicData>
+        </a:graphic>
+      </p:graphicFrame>
+    </p:spTree>
+  </p:cSld>
+  <p:clrMapOvr>
+    <a:masterClrMapping/>
+  </p:clrMapOvr>
+</p:sld>
+</file>
+
+<file path=ppt/slides/slide11.xml><?xml version="1.0" encoding="utf-8"?>
+<p:sld xmlns:a="http://schemas.openxmlformats.org/drawingml/2006/main" xmlns:r="http://schemas.openxmlformats.org/officeDocument/2006/relationships" xmlns:p="http://schemas.openxmlformats.org/presentationml/2006/main">
+  <p:cSld>
+    <p:spTree>
+      <p:nvGrpSpPr>
+        <p:cNvPr id="1" name="Shape 174"/>
+        <p:cNvGrpSpPr/>
+        <p:nvPr/>
+      </p:nvGrpSpPr>
+      <p:grpSpPr>
+        <a:xfrm>
+          <a:off x="0" y="0"/>
+          <a:ext cx="0" cy="0"/>
+          <a:chOff x="0" y="0"/>
+          <a:chExt cx="0" cy="0"/>
+        </a:xfrm>
+      </p:grpSpPr>
+      <p:sp>
+        <p:nvSpPr>
+          <p:cNvPr id="175" name="Google Shape;175;p10"/>
+          <p:cNvSpPr txBox="1"/>
+          <p:nvPr/>
+        </p:nvSpPr>
+        <p:spPr>
+          <a:xfrm>
+            <a:off x="0" y="6632575"/>
+            <a:ext cx="12192000" cy="225425"/>
+          </a:xfrm>
+          <a:prstGeom prst="rect">
+            <a:avLst/>
+          </a:prstGeom>
+          <a:solidFill>
+            <a:srgbClr val="381850"/>
+          </a:solidFill>
+          <a:ln>
+            <a:noFill/>
+          </a:ln>
+        </p:spPr>
+        <p:txBody>
+          <a:bodyPr spcFirstLastPara="1" wrap="square" lIns="91425" tIns="45700" rIns="91425" bIns="45700" anchor="ctr" anchorCtr="0">
+            <a:noAutofit/>
+          </a:bodyPr>
+          <a:lstStyle/>
+          <a:p>
+            <a:pPr marL="0" marR="0" lvl="0" indent="0" algn="l" rtl="0">
+              <a:lnSpc>
+                <a:spcPct val="100000"/>
+              </a:lnSpc>
+              <a:spcBef>
+                <a:spcPts val="0"/>
+              </a:spcBef>
+              <a:spcAft>
+                <a:spcPts val="0"/>
+              </a:spcAft>
+              <a:buNone/>
+            </a:pPr>
+            <a:endParaRPr sz="1800" b="0" i="0" u="none">
+              <a:solidFill>
+                <a:schemeClr val="dk1"/>
+              </a:solidFill>
+              <a:latin typeface="Arial"/>
+              <a:ea typeface="Arial"/>
+              <a:cs typeface="Arial"/>
+              <a:sym typeface="Arial"/>
+            </a:endParaRPr>
+          </a:p>
+        </p:txBody>
+      </p:sp>
+      <p:sp>
+        <p:nvSpPr>
+          <p:cNvPr id="176" name="Google Shape;176;p10"/>
+          <p:cNvSpPr txBox="1"/>
+          <p:nvPr/>
+        </p:nvSpPr>
+        <p:spPr>
+          <a:xfrm>
+            <a:off x="3509962" y="-6350"/>
+            <a:ext cx="5172075" cy="128587"/>
+          </a:xfrm>
+          <a:prstGeom prst="rect">
+            <a:avLst/>
+          </a:prstGeom>
+          <a:solidFill>
+            <a:srgbClr val="381850"/>
+          </a:solidFill>
+          <a:ln>
+            <a:noFill/>
+          </a:ln>
+        </p:spPr>
+        <p:txBody>
+          <a:bodyPr spcFirstLastPara="1" wrap="square" lIns="91425" tIns="45700" rIns="91425" bIns="45700" anchor="ctr" anchorCtr="0">
+            <a:noAutofit/>
+          </a:bodyPr>
+          <a:lstStyle/>
+          <a:p>
+            <a:pPr marL="0" marR="0" lvl="0" indent="0" algn="l" rtl="0">
+              <a:lnSpc>
+                <a:spcPct val="100000"/>
+              </a:lnSpc>
+              <a:spcBef>
+                <a:spcPts val="0"/>
+              </a:spcBef>
+              <a:spcAft>
+                <a:spcPts val="0"/>
+              </a:spcAft>
+              <a:buNone/>
+            </a:pPr>
+            <a:endParaRPr sz="1800" b="0" i="0" u="none">
+              <a:solidFill>
+                <a:schemeClr val="dk1"/>
+              </a:solidFill>
+              <a:latin typeface="Arial"/>
+              <a:ea typeface="Arial"/>
+              <a:cs typeface="Arial"/>
+              <a:sym typeface="Arial"/>
+            </a:endParaRPr>
+          </a:p>
+        </p:txBody>
+      </p:sp>
+      <p:sp>
+        <p:nvSpPr>
+          <p:cNvPr id="177" name="Google Shape;177;p10"/>
+          <p:cNvSpPr txBox="1"/>
+          <p:nvPr/>
+        </p:nvSpPr>
+        <p:spPr>
+          <a:xfrm>
+            <a:off x="992187" y="382587"/>
+            <a:ext cx="10207625" cy="584200"/>
+          </a:xfrm>
+          <a:prstGeom prst="rect">
+            <a:avLst/>
+          </a:prstGeom>
+          <a:noFill/>
+          <a:ln>
+            <a:noFill/>
+          </a:ln>
+        </p:spPr>
+        <p:txBody>
+          <a:bodyPr spcFirstLastPara="1" wrap="square" lIns="91425" tIns="45700" rIns="91425" bIns="45700" anchor="t" anchorCtr="0">
+            <a:spAutoFit/>
+          </a:bodyPr>
+          <a:lstStyle/>
+          <a:p>
+            <a:pPr marL="0" marR="0" lvl="0" indent="0" algn="ctr" rtl="0">
+              <a:lnSpc>
+                <a:spcPct val="100000"/>
+              </a:lnSpc>
+              <a:spcBef>
+                <a:spcPts val="0"/>
+              </a:spcBef>
+              <a:spcAft>
+                <a:spcPts val="0"/>
+              </a:spcAft>
+              <a:buClr>
+                <a:schemeClr val="dk1"/>
+              </a:buClr>
+              <a:buSzPts val="3200"/>
+              <a:buFont typeface="Georgia"/>
+              <a:buNone/>
+            </a:pPr>
+            <a:r>
+              <a:rPr lang="en-US" sz="3200" b="0" i="0" u="none" dirty="0">
+                <a:solidFill>
+                  <a:schemeClr val="dk1"/>
+                </a:solidFill>
+                <a:latin typeface="Georgia"/>
+                <a:ea typeface="Georgia"/>
+                <a:cs typeface="Georgia"/>
+                <a:sym typeface="Georgia"/>
+              </a:rPr>
+              <a:t>PROPOSED BLOCK DIAGRAM</a:t>
+            </a:r>
+            <a:endParaRPr dirty="0"/>
+          </a:p>
+        </p:txBody>
+      </p:sp>
+      <p:pic>
+        <p:nvPicPr>
+          <p:cNvPr id="3" name="Picture 2">
+            <a:extLst>
+              <a:ext uri="{FF2B5EF4-FFF2-40B4-BE49-F238E27FC236}">
+                <a16:creationId xmlns:a16="http://schemas.microsoft.com/office/drawing/2014/main" id="{0E25EAB6-CB01-526A-5C12-F7AB708CF889}"/>
+              </a:ext>
+            </a:extLst>
+          </p:cNvPr>
+          <p:cNvPicPr>
+            <a:picLocks noChangeAspect="1"/>
+          </p:cNvPicPr>
+          <p:nvPr/>
+        </p:nvPicPr>
+        <p:blipFill>
+          <a:blip r:embed="rId3"/>
+          <a:stretch>
+            <a:fillRect/>
+          </a:stretch>
+        </p:blipFill>
+        <p:spPr>
+          <a:xfrm>
+            <a:off x="4360864" y="921802"/>
+            <a:ext cx="3898233" cy="5478998"/>
+          </a:xfrm>
+          <a:prstGeom prst="rect">
+            <a:avLst/>
+          </a:prstGeom>
+        </p:spPr>
+      </p:pic>
+    </p:spTree>
+  </p:cSld>
+  <p:clrMapOvr>
+    <a:masterClrMapping/>
+  </p:clrMapOvr>
+</p:sld>
+</file>
+
+<file path=ppt/slides/slide12.xml><?xml version="1.0" encoding="utf-8"?>
+<p:sld xmlns:a="http://schemas.openxmlformats.org/drawingml/2006/main" xmlns:r="http://schemas.openxmlformats.org/officeDocument/2006/relationships" xmlns:p="http://schemas.openxmlformats.org/presentationml/2006/main">
+  <p:cSld>
+    <p:spTree>
+      <p:nvGrpSpPr>
+        <p:cNvPr id="1" name="Shape 182"/>
+        <p:cNvGrpSpPr/>
+        <p:nvPr/>
+      </p:nvGrpSpPr>
+      <p:grpSpPr>
+        <a:xfrm>
+          <a:off x="0" y="0"/>
+          <a:ext cx="0" cy="0"/>
+          <a:chOff x="0" y="0"/>
+          <a:chExt cx="0" cy="0"/>
+        </a:xfrm>
+      </p:grpSpPr>
+      <p:sp>
+        <p:nvSpPr>
+          <p:cNvPr id="183" name="Google Shape;183;p11"/>
+          <p:cNvSpPr txBox="1">
+            <a:spLocks noGrp="1"/>
+          </p:cNvSpPr>
+          <p:nvPr>
+            <p:ph type="body" idx="1"/>
+          </p:nvPr>
+        </p:nvSpPr>
+        <p:spPr>
+          <a:xfrm>
+            <a:off x="350075" y="3703214"/>
+            <a:ext cx="11360400" cy="847371"/>
+          </a:xfrm>
+          <a:prstGeom prst="rect">
+            <a:avLst/>
+          </a:prstGeom>
+          <a:noFill/>
+          <a:ln>
+            <a:noFill/>
+          </a:ln>
+        </p:spPr>
+        <p:txBody>
+          <a:bodyPr spcFirstLastPara="1" wrap="square" lIns="91425" tIns="45700" rIns="91425" bIns="45700" anchor="ctr" anchorCtr="0">
+            <a:spAutoFit/>
+          </a:bodyPr>
+          <a:lstStyle/>
+          <a:p>
+            <a:pPr marL="228600" lvl="0" indent="-114300" algn="just" rtl="0">
+              <a:spcBef>
+                <a:spcPts val="1000"/>
+              </a:spcBef>
+              <a:spcAft>
+                <a:spcPts val="0"/>
+              </a:spcAft>
+              <a:buClr>
+                <a:schemeClr val="dk1"/>
+              </a:buClr>
+              <a:buSzPts val="1100"/>
+              <a:buFont typeface="Arial"/>
+              <a:buNone/>
+            </a:pPr>
+            <a:endParaRPr sz="1800" dirty="0">
+              <a:latin typeface="Times New Roman"/>
+              <a:ea typeface="Times New Roman"/>
+              <a:cs typeface="Times New Roman"/>
+              <a:sym typeface="Times New Roman"/>
+            </a:endParaRPr>
+          </a:p>
+          <a:p>
+            <a:pPr marL="228600" marR="0" lvl="0" indent="-114300" algn="l" rtl="0">
+              <a:lnSpc>
+                <a:spcPct val="90000"/>
+              </a:lnSpc>
+              <a:spcBef>
+                <a:spcPts val="1000"/>
+              </a:spcBef>
+              <a:spcAft>
+                <a:spcPts val="0"/>
+              </a:spcAft>
+              <a:buClr>
+                <a:schemeClr val="dk1"/>
+              </a:buClr>
+              <a:buSzPts val="1800"/>
+              <a:buFont typeface="Arial"/>
+              <a:buNone/>
+            </a:pPr>
+            <a:endParaRPr sz="1800" b="1" dirty="0">
+              <a:latin typeface="Times New Roman"/>
+              <a:ea typeface="Times New Roman"/>
+              <a:cs typeface="Times New Roman"/>
+              <a:sym typeface="Times New Roman"/>
+            </a:endParaRPr>
+          </a:p>
+        </p:txBody>
+      </p:sp>
+      <p:sp>
+        <p:nvSpPr>
+          <p:cNvPr id="184" name="Google Shape;184;p11"/>
+          <p:cNvSpPr txBox="1"/>
+          <p:nvPr/>
+        </p:nvSpPr>
+        <p:spPr>
+          <a:xfrm>
+            <a:off x="2649125" y="547062"/>
+            <a:ext cx="9398100" cy="716100"/>
+          </a:xfrm>
+          <a:prstGeom prst="rect">
+            <a:avLst/>
+          </a:prstGeom>
+          <a:noFill/>
+          <a:ln>
+            <a:noFill/>
+          </a:ln>
+        </p:spPr>
+        <p:txBody>
+          <a:bodyPr spcFirstLastPara="1" wrap="square" lIns="91425" tIns="45700" rIns="91425" bIns="45700" anchor="ctr" anchorCtr="0">
+            <a:noAutofit/>
+          </a:bodyPr>
+          <a:lstStyle/>
+          <a:p>
+            <a:pPr marL="0" marR="0" lvl="0" indent="0" algn="l" rtl="0">
+              <a:lnSpc>
+                <a:spcPct val="90000"/>
+              </a:lnSpc>
+              <a:spcBef>
+                <a:spcPts val="0"/>
+              </a:spcBef>
+              <a:spcAft>
+                <a:spcPts val="0"/>
+              </a:spcAft>
+              <a:buClr>
+                <a:schemeClr val="dk1"/>
+              </a:buClr>
+              <a:buSzPts val="3200"/>
+              <a:buFont typeface="Georgia"/>
+              <a:buNone/>
+            </a:pPr>
+            <a:r>
+              <a:rPr lang="en-US" sz="3200" b="0" i="0" u="none">
+                <a:solidFill>
+                  <a:schemeClr val="dk1"/>
+                </a:solidFill>
+                <a:latin typeface="Georgia"/>
+                <a:ea typeface="Georgia"/>
+                <a:cs typeface="Georgia"/>
+                <a:sym typeface="Georgia"/>
+              </a:rPr>
+              <a:t>DETAILS OF PROPOSED SYSTEM</a:t>
+            </a:r>
+            <a:endParaRPr/>
+          </a:p>
+        </p:txBody>
+      </p:sp>
+      <p:sp>
+        <p:nvSpPr>
+          <p:cNvPr id="3" name="TextBox 2">
+            <a:extLst>
+              <a:ext uri="{FF2B5EF4-FFF2-40B4-BE49-F238E27FC236}">
+                <a16:creationId xmlns:a16="http://schemas.microsoft.com/office/drawing/2014/main" id="{D6BF4FD6-3248-AD7B-7015-FDBE1B8BAD9D}"/>
+              </a:ext>
+            </a:extLst>
+          </p:cNvPr>
+          <p:cNvSpPr txBox="1"/>
+          <p:nvPr/>
+        </p:nvSpPr>
+        <p:spPr>
+          <a:xfrm>
+            <a:off x="946483" y="1459832"/>
+            <a:ext cx="9529011" cy="4524315"/>
+          </a:xfrm>
+          <a:prstGeom prst="rect">
+            <a:avLst/>
+          </a:prstGeom>
+          <a:noFill/>
+        </p:spPr>
+        <p:txBody>
+          <a:bodyPr wrap="square">
+            <a:spAutoFit/>
+          </a:bodyPr>
+          <a:lstStyle/>
+          <a:p>
+            <a:pPr>
+              <a:buNone/>
+            </a:pPr>
+            <a:r>
+              <a:rPr lang="en-IN" sz="2400" b="1" dirty="0"/>
+              <a:t>Physical Elevator Prototype</a:t>
+            </a:r>
+          </a:p>
+          <a:p>
+            <a:pPr>
+              <a:buNone/>
+            </a:pPr>
+            <a:r>
+              <a:rPr lang="en-IN" sz="2400" dirty="0"/>
+              <a:t>A small-scale elevator model will be constructed using low-cost materials. A DC geared motor will control the movement of the elevator cabin between floors.</a:t>
+            </a:r>
+          </a:p>
+          <a:p>
+            <a:pPr>
+              <a:buNone/>
+            </a:pPr>
+            <a:endParaRPr lang="en-IN" sz="2400" dirty="0"/>
+          </a:p>
+          <a:p>
+            <a:pPr>
+              <a:buNone/>
+            </a:pPr>
+            <a:r>
+              <a:rPr lang="en-IN" sz="2400" b="1" dirty="0"/>
+              <a:t>Sensor Module</a:t>
+            </a:r>
+          </a:p>
+          <a:p>
+            <a:pPr>
+              <a:buNone/>
+            </a:pPr>
+            <a:r>
+              <a:rPr lang="en-IN" sz="2400" dirty="0"/>
+              <a:t>Sensors will continuously collect elevator operating parameters:</a:t>
+            </a:r>
+          </a:p>
+          <a:p>
+            <a:pPr marL="342900" lvl="0" indent="-342900">
+              <a:buFont typeface="Arial" panose="020B0604020202020204" pitchFamily="34" charset="0"/>
+              <a:buChar char="•"/>
+            </a:pPr>
+            <a:r>
+              <a:rPr lang="en-IN" sz="2400" b="1" dirty="0"/>
+              <a:t>Vibration sensor</a:t>
+            </a:r>
+            <a:r>
+              <a:rPr lang="en-IN" sz="2400" dirty="0"/>
+              <a:t> → detects abnormal vibration </a:t>
+            </a:r>
+          </a:p>
+          <a:p>
+            <a:pPr marL="342900" lvl="0" indent="-342900">
+              <a:buFont typeface="Arial" panose="020B0604020202020204" pitchFamily="34" charset="0"/>
+              <a:buChar char="•"/>
+            </a:pPr>
+            <a:r>
+              <a:rPr lang="en-IN" sz="2400" b="1" dirty="0"/>
+              <a:t>Temperature sensor</a:t>
+            </a:r>
+            <a:r>
+              <a:rPr lang="en-IN" sz="2400" dirty="0"/>
+              <a:t> → monitors overheating </a:t>
+            </a:r>
+          </a:p>
+          <a:p>
+            <a:pPr marL="342900" lvl="0" indent="-342900">
+              <a:buFont typeface="Arial" panose="020B0604020202020204" pitchFamily="34" charset="0"/>
+              <a:buChar char="•"/>
+            </a:pPr>
+            <a:r>
+              <a:rPr lang="en-IN" sz="2400" b="1" dirty="0"/>
+              <a:t>IR sensor</a:t>
+            </a:r>
+            <a:r>
+              <a:rPr lang="en-IN" sz="2400" dirty="0"/>
+              <a:t> → detects floor position </a:t>
+            </a:r>
+          </a:p>
+          <a:p>
+            <a:pPr marL="342900" lvl="0" indent="-342900">
+              <a:buFont typeface="Arial" panose="020B0604020202020204" pitchFamily="34" charset="0"/>
+              <a:buChar char="•"/>
+            </a:pPr>
+            <a:r>
+              <a:rPr lang="en-IN" sz="2400" b="1" dirty="0"/>
+              <a:t>IR obstacle sensor</a:t>
+            </a:r>
+            <a:r>
+              <a:rPr lang="en-IN" sz="2400" dirty="0"/>
+              <a:t> → detects door obstruction </a:t>
+            </a:r>
+          </a:p>
+          <a:p>
+            <a:pPr marL="342900" lvl="0" indent="-342900">
+              <a:buFont typeface="Arial" panose="020B0604020202020204" pitchFamily="34" charset="0"/>
+              <a:buChar char="•"/>
+            </a:pPr>
+            <a:r>
+              <a:rPr lang="en-IN" sz="2400" b="1" dirty="0"/>
+              <a:t>Optional current sensor</a:t>
+            </a:r>
+            <a:r>
+              <a:rPr lang="en-IN" sz="2400" dirty="0"/>
+              <a:t> → monitors motor current </a:t>
+            </a:r>
+          </a:p>
+        </p:txBody>
+      </p:sp>
+    </p:spTree>
+  </p:cSld>
+  <p:clrMapOvr>
+    <a:masterClrMapping/>
+  </p:clrMapOvr>
+</p:sld>
+</file>
+
+<file path=ppt/slides/slide13.xml><?xml version="1.0" encoding="utf-8"?>
 <p:sld xmlns:a="http://schemas.openxmlformats.org/drawingml/2006/main" xmlns:r="http://schemas.openxmlformats.org/officeDocument/2006/relationships" xmlns:p="http://schemas.openxmlformats.org/presentationml/2006/main">
   <p:cSld>
     <p:spTree>
@@ -18434,7 +20095,7 @@
               <a:buNone/>
             </a:pPr>
             <a:r>
-              <a:rPr lang="en-US" sz="3200" b="0" i="0" u="none">
+              <a:rPr lang="en-US" sz="3200" b="0" i="0" u="none" dirty="0">
                 <a:solidFill>
                   <a:schemeClr val="dk1"/>
                 </a:solidFill>
@@ -18445,7 +20106,7 @@
               </a:rPr>
               <a:t>OBJECTIVE</a:t>
             </a:r>
-            <a:endParaRPr/>
+            <a:endParaRPr dirty="0"/>
           </a:p>
         </p:txBody>
       </p:sp>
@@ -18867,6 +20528,772 @@
 </file>
 
 <file path=ppt/slides/slide5.xml><?xml version="1.0" encoding="utf-8"?>
+<p:sld xmlns:a="http://schemas.openxmlformats.org/drawingml/2006/main" xmlns:r="http://schemas.openxmlformats.org/officeDocument/2006/relationships" xmlns:p="http://schemas.openxmlformats.org/presentationml/2006/main">
+  <p:cSld>
+    <p:spTree>
+      <p:nvGrpSpPr>
+        <p:cNvPr id="1" name="">
+          <a:extLst>
+            <a:ext uri="{FF2B5EF4-FFF2-40B4-BE49-F238E27FC236}">
+              <a16:creationId xmlns:a16="http://schemas.microsoft.com/office/drawing/2014/main" id="{0317DE73-086B-70FE-4666-0846181654B9}"/>
+            </a:ext>
+          </a:extLst>
+        </p:cNvPr>
+        <p:cNvGrpSpPr/>
+        <p:nvPr/>
+      </p:nvGrpSpPr>
+      <p:grpSpPr>
+        <a:xfrm>
+          <a:off x="0" y="0"/>
+          <a:ext cx="0" cy="0"/>
+          <a:chOff x="0" y="0"/>
+          <a:chExt cx="0" cy="0"/>
+        </a:xfrm>
+      </p:grpSpPr>
+      <p:sp>
+        <p:nvSpPr>
+          <p:cNvPr id="3" name="Google Shape;127;p4">
+            <a:extLst>
+              <a:ext uri="{FF2B5EF4-FFF2-40B4-BE49-F238E27FC236}">
+                <a16:creationId xmlns:a16="http://schemas.microsoft.com/office/drawing/2014/main" id="{1ECABD24-DBC0-4373-B409-00FA6B2BFF62}"/>
+              </a:ext>
+            </a:extLst>
+          </p:cNvPr>
+          <p:cNvSpPr txBox="1"/>
+          <p:nvPr/>
+        </p:nvSpPr>
+        <p:spPr>
+          <a:xfrm>
+            <a:off x="0" y="6632575"/>
+            <a:ext cx="12192000" cy="225425"/>
+          </a:xfrm>
+          <a:prstGeom prst="rect">
+            <a:avLst/>
+          </a:prstGeom>
+          <a:solidFill>
+            <a:srgbClr val="381850"/>
+          </a:solidFill>
+          <a:ln>
+            <a:noFill/>
+          </a:ln>
+        </p:spPr>
+        <p:txBody>
+          <a:bodyPr spcFirstLastPara="1" wrap="square" lIns="91425" tIns="45700" rIns="91425" bIns="45700" anchor="ctr" anchorCtr="0">
+            <a:noAutofit/>
+          </a:bodyPr>
+          <a:lstStyle/>
+          <a:p>
+            <a:pPr marL="0" marR="0" lvl="0" indent="0" algn="l" rtl="0">
+              <a:lnSpc>
+                <a:spcPct val="100000"/>
+              </a:lnSpc>
+              <a:spcBef>
+                <a:spcPts val="0"/>
+              </a:spcBef>
+              <a:spcAft>
+                <a:spcPts val="0"/>
+              </a:spcAft>
+              <a:buNone/>
+            </a:pPr>
+            <a:endParaRPr sz="1800" b="0" i="0" u="none" dirty="0">
+              <a:solidFill>
+                <a:schemeClr val="dk1"/>
+              </a:solidFill>
+              <a:latin typeface="Arial"/>
+              <a:ea typeface="Arial"/>
+              <a:cs typeface="Arial"/>
+              <a:sym typeface="Arial"/>
+            </a:endParaRPr>
+          </a:p>
+        </p:txBody>
+      </p:sp>
+      <p:sp>
+        <p:nvSpPr>
+          <p:cNvPr id="5" name="Google Shape;128;p4">
+            <a:extLst>
+              <a:ext uri="{FF2B5EF4-FFF2-40B4-BE49-F238E27FC236}">
+                <a16:creationId xmlns:a16="http://schemas.microsoft.com/office/drawing/2014/main" id="{807A91D6-5B00-9FA3-14BD-C7D8504B9ABE}"/>
+              </a:ext>
+            </a:extLst>
+          </p:cNvPr>
+          <p:cNvSpPr txBox="1"/>
+          <p:nvPr/>
+        </p:nvSpPr>
+        <p:spPr>
+          <a:xfrm>
+            <a:off x="3509962" y="-6350"/>
+            <a:ext cx="5172075" cy="128587"/>
+          </a:xfrm>
+          <a:prstGeom prst="rect">
+            <a:avLst/>
+          </a:prstGeom>
+          <a:solidFill>
+            <a:srgbClr val="381850"/>
+          </a:solidFill>
+          <a:ln>
+            <a:noFill/>
+          </a:ln>
+        </p:spPr>
+        <p:txBody>
+          <a:bodyPr spcFirstLastPara="1" wrap="square" lIns="91425" tIns="45700" rIns="91425" bIns="45700" anchor="ctr" anchorCtr="0">
+            <a:noAutofit/>
+          </a:bodyPr>
+          <a:lstStyle/>
+          <a:p>
+            <a:pPr marL="0" marR="0" lvl="0" indent="0" algn="l" rtl="0">
+              <a:lnSpc>
+                <a:spcPct val="100000"/>
+              </a:lnSpc>
+              <a:spcBef>
+                <a:spcPts val="0"/>
+              </a:spcBef>
+              <a:spcAft>
+                <a:spcPts val="0"/>
+              </a:spcAft>
+              <a:buNone/>
+            </a:pPr>
+            <a:endParaRPr sz="1800" b="0" i="0" u="none" dirty="0">
+              <a:solidFill>
+                <a:schemeClr val="dk1"/>
+              </a:solidFill>
+              <a:latin typeface="Arial"/>
+              <a:ea typeface="Arial"/>
+              <a:cs typeface="Arial"/>
+              <a:sym typeface="Arial"/>
+            </a:endParaRPr>
+          </a:p>
+        </p:txBody>
+      </p:sp>
+      <p:sp>
+        <p:nvSpPr>
+          <p:cNvPr id="4" name="TextBox 3">
+            <a:extLst>
+              <a:ext uri="{FF2B5EF4-FFF2-40B4-BE49-F238E27FC236}">
+                <a16:creationId xmlns:a16="http://schemas.microsoft.com/office/drawing/2014/main" id="{43E73485-6B24-893E-072A-DB0DA21176CE}"/>
+              </a:ext>
+            </a:extLst>
+          </p:cNvPr>
+          <p:cNvSpPr txBox="1"/>
+          <p:nvPr/>
+        </p:nvSpPr>
+        <p:spPr>
+          <a:xfrm>
+            <a:off x="3509962" y="216310"/>
+            <a:ext cx="6105986" cy="707886"/>
+          </a:xfrm>
+          <a:prstGeom prst="rect">
+            <a:avLst/>
+          </a:prstGeom>
+          <a:noFill/>
+        </p:spPr>
+        <p:txBody>
+          <a:bodyPr wrap="square">
+            <a:spAutoFit/>
+          </a:bodyPr>
+          <a:lstStyle/>
+          <a:p>
+            <a:pPr>
+              <a:buNone/>
+            </a:pPr>
+            <a:r>
+              <a:rPr lang="en-IN" sz="2000" dirty="0">
+                <a:latin typeface="Georgia" panose="02040502050405020303" pitchFamily="18" charset="0"/>
+              </a:rPr>
+              <a:t>SOFTWARE-BASED ELEVATOR DIGITAL </a:t>
+            </a:r>
+          </a:p>
+          <a:p>
+            <a:pPr>
+              <a:buNone/>
+            </a:pPr>
+            <a:r>
+              <a:rPr lang="en-IN" sz="2000" dirty="0">
+                <a:latin typeface="Georgia" panose="02040502050405020303" pitchFamily="18" charset="0"/>
+              </a:rPr>
+              <a:t>                    TWIN     SIMULATION</a:t>
+            </a:r>
+          </a:p>
+        </p:txBody>
+      </p:sp>
+      <p:sp>
+        <p:nvSpPr>
+          <p:cNvPr id="7" name="TextBox 6">
+            <a:extLst>
+              <a:ext uri="{FF2B5EF4-FFF2-40B4-BE49-F238E27FC236}">
+                <a16:creationId xmlns:a16="http://schemas.microsoft.com/office/drawing/2014/main" id="{9DD67002-3F5C-E1E7-5DD2-F3CEF0507F1C}"/>
+              </a:ext>
+            </a:extLst>
+          </p:cNvPr>
+          <p:cNvSpPr txBox="1"/>
+          <p:nvPr/>
+        </p:nvSpPr>
+        <p:spPr>
+          <a:xfrm>
+            <a:off x="1415845" y="1018269"/>
+            <a:ext cx="8957187" cy="4708981"/>
+          </a:xfrm>
+          <a:prstGeom prst="rect">
+            <a:avLst/>
+          </a:prstGeom>
+          <a:noFill/>
+        </p:spPr>
+        <p:txBody>
+          <a:bodyPr wrap="square">
+            <a:spAutoFit/>
+          </a:bodyPr>
+          <a:lstStyle/>
+          <a:p>
+            <a:pPr algn="just">
+              <a:buNone/>
+            </a:pPr>
+            <a:r>
+              <a:rPr lang="en-IN" sz="2000" b="1" dirty="0"/>
+              <a:t>Virtual Elevator Model</a:t>
+            </a:r>
+            <a:endParaRPr lang="en-IN" sz="2000" dirty="0"/>
+          </a:p>
+          <a:p>
+            <a:pPr marL="342900" lvl="0" indent="-342900" algn="just">
+              <a:buFont typeface="Wingdings" panose="05000000000000000000" pitchFamily="2" charset="2"/>
+              <a:buChar char="Ø"/>
+            </a:pPr>
+            <a:r>
+              <a:rPr lang="en-IN" sz="2000" dirty="0"/>
+              <a:t>Simulates elevator movement between multiple floors.</a:t>
+            </a:r>
+          </a:p>
+          <a:p>
+            <a:pPr marL="342900" lvl="0" indent="-342900" algn="just">
+              <a:buFont typeface="Wingdings" panose="05000000000000000000" pitchFamily="2" charset="2"/>
+              <a:buChar char="Ø"/>
+            </a:pPr>
+            <a:r>
+              <a:rPr lang="en-IN" sz="2000" dirty="0"/>
+              <a:t>Displays current floor and movement direction.</a:t>
+            </a:r>
+          </a:p>
+          <a:p>
+            <a:pPr algn="just">
+              <a:buNone/>
+            </a:pPr>
+            <a:r>
+              <a:rPr lang="en-IN" sz="2000" b="1" dirty="0"/>
+              <a:t>Sensor Data Simulation</a:t>
+            </a:r>
+            <a:endParaRPr lang="en-IN" sz="2000" dirty="0"/>
+          </a:p>
+          <a:p>
+            <a:pPr marL="342900" lvl="0" indent="-342900" algn="just">
+              <a:buFont typeface="Wingdings" panose="05000000000000000000" pitchFamily="2" charset="2"/>
+              <a:buChar char="Ø"/>
+            </a:pPr>
+            <a:r>
+              <a:rPr lang="en-IN" sz="2000" dirty="0"/>
+              <a:t>Generates temperature, vibration, motor current, and door status readings.</a:t>
+            </a:r>
+          </a:p>
+          <a:p>
+            <a:pPr marL="342900" lvl="0" indent="-342900" algn="just">
+              <a:buFont typeface="Wingdings" panose="05000000000000000000" pitchFamily="2" charset="2"/>
+              <a:buChar char="Ø"/>
+            </a:pPr>
+            <a:r>
+              <a:rPr lang="en-IN" sz="2000" dirty="0"/>
+              <a:t>Updates sensor values at regular intervals.</a:t>
+            </a:r>
+          </a:p>
+          <a:p>
+            <a:pPr algn="just">
+              <a:buNone/>
+            </a:pPr>
+            <a:r>
+              <a:rPr lang="en-IN" sz="2000" b="1" dirty="0"/>
+              <a:t>Fault Simulation</a:t>
+            </a:r>
+            <a:endParaRPr lang="en-IN" sz="2000" dirty="0"/>
+          </a:p>
+          <a:p>
+            <a:pPr marL="342900" lvl="0" indent="-342900" algn="just">
+              <a:buFont typeface="Wingdings" panose="05000000000000000000" pitchFamily="2" charset="2"/>
+              <a:buChar char="Ø"/>
+            </a:pPr>
+            <a:r>
+              <a:rPr lang="en-IN" sz="2000" dirty="0"/>
+              <a:t>Simulates excessive vibration and door malfunction.</a:t>
+            </a:r>
+          </a:p>
+          <a:p>
+            <a:pPr marL="342900" lvl="0" indent="-342900" algn="just">
+              <a:buFont typeface="Wingdings" panose="05000000000000000000" pitchFamily="2" charset="2"/>
+              <a:buChar char="Ø"/>
+            </a:pPr>
+            <a:r>
+              <a:rPr lang="en-IN" sz="2000" dirty="0"/>
+              <a:t>Generates alerts for abnormal conditions.</a:t>
+            </a:r>
+          </a:p>
+          <a:p>
+            <a:pPr algn="just">
+              <a:buNone/>
+            </a:pPr>
+            <a:r>
+              <a:rPr lang="en-IN" sz="2000" b="1" dirty="0"/>
+              <a:t>Real-Time Dashboard</a:t>
+            </a:r>
+            <a:endParaRPr lang="en-IN" sz="2000" dirty="0"/>
+          </a:p>
+          <a:p>
+            <a:pPr marL="342900" lvl="0" indent="-342900" algn="just">
+              <a:buFont typeface="Wingdings" panose="05000000000000000000" pitchFamily="2" charset="2"/>
+              <a:buChar char="Ø"/>
+            </a:pPr>
+            <a:r>
+              <a:rPr lang="en-IN" sz="2000" dirty="0"/>
+              <a:t>Displays elevator status and live sensor readings.</a:t>
+            </a:r>
+          </a:p>
+          <a:p>
+            <a:pPr marL="342900" lvl="0" indent="-342900" algn="just">
+              <a:buFont typeface="Wingdings" panose="05000000000000000000" pitchFamily="2" charset="2"/>
+              <a:buChar char="Ø"/>
+            </a:pPr>
+            <a:r>
+              <a:rPr lang="en-IN" sz="2000" dirty="0"/>
+              <a:t>Visualizes elevator movement and fault alerts.</a:t>
+            </a:r>
+          </a:p>
+          <a:p>
+            <a:pPr algn="just">
+              <a:buNone/>
+            </a:pPr>
+            <a:r>
+              <a:rPr lang="en-IN" sz="2000" b="1" dirty="0"/>
+              <a:t>Backend Integration</a:t>
+            </a:r>
+            <a:endParaRPr lang="en-IN" sz="2000" dirty="0"/>
+          </a:p>
+          <a:p>
+            <a:pPr marL="342900" lvl="0" indent="-342900" algn="just">
+              <a:buFont typeface="Wingdings" panose="05000000000000000000" pitchFamily="2" charset="2"/>
+              <a:buChar char="Ø"/>
+            </a:pPr>
+            <a:r>
+              <a:rPr lang="en-IN" sz="2000" dirty="0"/>
+              <a:t>React.js for simulation and visualization.</a:t>
+            </a:r>
+          </a:p>
+          <a:p>
+            <a:pPr marL="342900" lvl="0" indent="-342900" algn="just">
+              <a:buFont typeface="Wingdings" panose="05000000000000000000" pitchFamily="2" charset="2"/>
+              <a:buChar char="Ø"/>
+            </a:pPr>
+            <a:r>
+              <a:rPr lang="en-IN" sz="2000" dirty="0"/>
+              <a:t>Spring Boot REST APIs for telemetry processing and storage.</a:t>
+            </a:r>
+          </a:p>
+        </p:txBody>
+      </p:sp>
+    </p:spTree>
+    <p:extLst>
+      <p:ext uri="{BB962C8B-B14F-4D97-AF65-F5344CB8AC3E}">
+        <p14:creationId xmlns:p14="http://schemas.microsoft.com/office/powerpoint/2010/main" val="638394914"/>
+      </p:ext>
+    </p:extLst>
+  </p:cSld>
+  <p:clrMapOvr>
+    <a:masterClrMapping/>
+  </p:clrMapOvr>
+</p:sld>
+</file>
+
+<file path=ppt/slides/slide6.xml><?xml version="1.0" encoding="utf-8"?>
+<p:sld xmlns:a="http://schemas.openxmlformats.org/drawingml/2006/main" xmlns:r="http://schemas.openxmlformats.org/officeDocument/2006/relationships" xmlns:p="http://schemas.openxmlformats.org/presentationml/2006/main">
+  <p:cSld>
+    <p:spTree>
+      <p:nvGrpSpPr>
+        <p:cNvPr id="1" name=""/>
+        <p:cNvGrpSpPr/>
+        <p:nvPr/>
+      </p:nvGrpSpPr>
+      <p:grpSpPr>
+        <a:xfrm>
+          <a:off x="0" y="0"/>
+          <a:ext cx="0" cy="0"/>
+          <a:chOff x="0" y="0"/>
+          <a:chExt cx="0" cy="0"/>
+        </a:xfrm>
+      </p:grpSpPr>
+      <p:sp>
+        <p:nvSpPr>
+          <p:cNvPr id="3" name="Google Shape;127;p4">
+            <a:extLst>
+              <a:ext uri="{FF2B5EF4-FFF2-40B4-BE49-F238E27FC236}">
+                <a16:creationId xmlns:a16="http://schemas.microsoft.com/office/drawing/2014/main" id="{E8379BE1-B4BA-B2E7-5037-20CD353C7CDC}"/>
+              </a:ext>
+            </a:extLst>
+          </p:cNvPr>
+          <p:cNvSpPr txBox="1"/>
+          <p:nvPr/>
+        </p:nvSpPr>
+        <p:spPr>
+          <a:xfrm>
+            <a:off x="0" y="6632575"/>
+            <a:ext cx="12192000" cy="225425"/>
+          </a:xfrm>
+          <a:prstGeom prst="rect">
+            <a:avLst/>
+          </a:prstGeom>
+          <a:solidFill>
+            <a:srgbClr val="381850"/>
+          </a:solidFill>
+          <a:ln>
+            <a:noFill/>
+          </a:ln>
+        </p:spPr>
+        <p:txBody>
+          <a:bodyPr spcFirstLastPara="1" wrap="square" lIns="91425" tIns="45700" rIns="91425" bIns="45700" anchor="ctr" anchorCtr="0">
+            <a:noAutofit/>
+          </a:bodyPr>
+          <a:lstStyle/>
+          <a:p>
+            <a:pPr marL="0" marR="0" lvl="0" indent="0" algn="l" rtl="0">
+              <a:lnSpc>
+                <a:spcPct val="100000"/>
+              </a:lnSpc>
+              <a:spcBef>
+                <a:spcPts val="0"/>
+              </a:spcBef>
+              <a:spcAft>
+                <a:spcPts val="0"/>
+              </a:spcAft>
+              <a:buNone/>
+            </a:pPr>
+            <a:endParaRPr sz="1800" b="0" i="0" u="none" dirty="0">
+              <a:solidFill>
+                <a:schemeClr val="dk1"/>
+              </a:solidFill>
+              <a:latin typeface="Arial"/>
+              <a:ea typeface="Arial"/>
+              <a:cs typeface="Arial"/>
+              <a:sym typeface="Arial"/>
+            </a:endParaRPr>
+          </a:p>
+        </p:txBody>
+      </p:sp>
+      <p:sp>
+        <p:nvSpPr>
+          <p:cNvPr id="5" name="Google Shape;128;p4">
+            <a:extLst>
+              <a:ext uri="{FF2B5EF4-FFF2-40B4-BE49-F238E27FC236}">
+                <a16:creationId xmlns:a16="http://schemas.microsoft.com/office/drawing/2014/main" id="{57357BB5-3838-278B-63B9-3B688738BE6E}"/>
+              </a:ext>
+            </a:extLst>
+          </p:cNvPr>
+          <p:cNvSpPr txBox="1"/>
+          <p:nvPr/>
+        </p:nvSpPr>
+        <p:spPr>
+          <a:xfrm>
+            <a:off x="3509962" y="-6350"/>
+            <a:ext cx="5172075" cy="128587"/>
+          </a:xfrm>
+          <a:prstGeom prst="rect">
+            <a:avLst/>
+          </a:prstGeom>
+          <a:solidFill>
+            <a:srgbClr val="381850"/>
+          </a:solidFill>
+          <a:ln>
+            <a:noFill/>
+          </a:ln>
+        </p:spPr>
+        <p:txBody>
+          <a:bodyPr spcFirstLastPara="1" wrap="square" lIns="91425" tIns="45700" rIns="91425" bIns="45700" anchor="ctr" anchorCtr="0">
+            <a:noAutofit/>
+          </a:bodyPr>
+          <a:lstStyle/>
+          <a:p>
+            <a:pPr marL="0" marR="0" lvl="0" indent="0" algn="l" rtl="0">
+              <a:lnSpc>
+                <a:spcPct val="100000"/>
+              </a:lnSpc>
+              <a:spcBef>
+                <a:spcPts val="0"/>
+              </a:spcBef>
+              <a:spcAft>
+                <a:spcPts val="0"/>
+              </a:spcAft>
+              <a:buNone/>
+            </a:pPr>
+            <a:endParaRPr sz="1800" b="0" i="0" u="none" dirty="0">
+              <a:solidFill>
+                <a:schemeClr val="dk1"/>
+              </a:solidFill>
+              <a:latin typeface="Arial"/>
+              <a:ea typeface="Arial"/>
+              <a:cs typeface="Arial"/>
+              <a:sym typeface="Arial"/>
+            </a:endParaRPr>
+          </a:p>
+        </p:txBody>
+      </p:sp>
+      <p:sp>
+        <p:nvSpPr>
+          <p:cNvPr id="11" name="TextBox 10">
+            <a:extLst>
+              <a:ext uri="{FF2B5EF4-FFF2-40B4-BE49-F238E27FC236}">
+                <a16:creationId xmlns:a16="http://schemas.microsoft.com/office/drawing/2014/main" id="{26535DBE-B1CE-BE28-F69B-DCC04A0F9D46}"/>
+              </a:ext>
+            </a:extLst>
+          </p:cNvPr>
+          <p:cNvSpPr txBox="1"/>
+          <p:nvPr/>
+        </p:nvSpPr>
+        <p:spPr>
+          <a:xfrm>
+            <a:off x="3401961" y="300520"/>
+            <a:ext cx="6096000" cy="307777"/>
+          </a:xfrm>
+          <a:prstGeom prst="rect">
+            <a:avLst/>
+          </a:prstGeom>
+          <a:noFill/>
+        </p:spPr>
+        <p:txBody>
+          <a:bodyPr wrap="square">
+            <a:spAutoFit/>
+          </a:bodyPr>
+          <a:lstStyle/>
+          <a:p>
+            <a:pPr>
+              <a:buNone/>
+            </a:pPr>
+            <a:r>
+              <a:rPr lang="en-IN" sz="1400" b="1" dirty="0"/>
+              <a:t>SOFTWARE-BASED ELEVATOR DIGITAL TWIN SIMULATION</a:t>
+            </a:r>
+          </a:p>
+        </p:txBody>
+      </p:sp>
+      <p:pic>
+        <p:nvPicPr>
+          <p:cNvPr id="12" name="Picture 11">
+            <a:extLst>
+              <a:ext uri="{FF2B5EF4-FFF2-40B4-BE49-F238E27FC236}">
+                <a16:creationId xmlns:a16="http://schemas.microsoft.com/office/drawing/2014/main" id="{CC09D5E9-528A-D616-449C-706100C6B379}"/>
+              </a:ext>
+            </a:extLst>
+          </p:cNvPr>
+          <p:cNvPicPr>
+            <a:picLocks noChangeAspect="1"/>
+          </p:cNvPicPr>
+          <p:nvPr/>
+        </p:nvPicPr>
+        <p:blipFill>
+          <a:blip r:embed="rId2"/>
+          <a:stretch>
+            <a:fillRect/>
+          </a:stretch>
+        </p:blipFill>
+        <p:spPr>
+          <a:xfrm>
+            <a:off x="952500" y="0"/>
+            <a:ext cx="10287000" cy="6557480"/>
+          </a:xfrm>
+          <a:prstGeom prst="rect">
+            <a:avLst/>
+          </a:prstGeom>
+        </p:spPr>
+      </p:pic>
+    </p:spTree>
+    <p:extLst>
+      <p:ext uri="{BB962C8B-B14F-4D97-AF65-F5344CB8AC3E}">
+        <p14:creationId xmlns:p14="http://schemas.microsoft.com/office/powerpoint/2010/main" val="1058519529"/>
+      </p:ext>
+    </p:extLst>
+  </p:cSld>
+  <p:clrMapOvr>
+    <a:masterClrMapping/>
+  </p:clrMapOvr>
+</p:sld>
+</file>
+
+<file path=ppt/slides/slide7.xml><?xml version="1.0" encoding="utf-8"?>
+<p:sld xmlns:a="http://schemas.openxmlformats.org/drawingml/2006/main" xmlns:r="http://schemas.openxmlformats.org/officeDocument/2006/relationships" xmlns:p="http://schemas.openxmlformats.org/presentationml/2006/main">
+  <p:cSld>
+    <p:spTree>
+      <p:nvGrpSpPr>
+        <p:cNvPr id="1" name=""/>
+        <p:cNvGrpSpPr/>
+        <p:nvPr/>
+      </p:nvGrpSpPr>
+      <p:grpSpPr>
+        <a:xfrm>
+          <a:off x="0" y="0"/>
+          <a:ext cx="0" cy="0"/>
+          <a:chOff x="0" y="0"/>
+          <a:chExt cx="0" cy="0"/>
+        </a:xfrm>
+      </p:grpSpPr>
+      <p:sp>
+        <p:nvSpPr>
+          <p:cNvPr id="3" name="Google Shape;127;p4">
+            <a:extLst>
+              <a:ext uri="{FF2B5EF4-FFF2-40B4-BE49-F238E27FC236}">
+                <a16:creationId xmlns:a16="http://schemas.microsoft.com/office/drawing/2014/main" id="{2D988CDC-CCE5-E499-E0E6-50FE0276D10A}"/>
+              </a:ext>
+            </a:extLst>
+          </p:cNvPr>
+          <p:cNvSpPr txBox="1"/>
+          <p:nvPr/>
+        </p:nvSpPr>
+        <p:spPr>
+          <a:xfrm>
+            <a:off x="0" y="6632575"/>
+            <a:ext cx="12192000" cy="225425"/>
+          </a:xfrm>
+          <a:prstGeom prst="rect">
+            <a:avLst/>
+          </a:prstGeom>
+          <a:solidFill>
+            <a:srgbClr val="381850"/>
+          </a:solidFill>
+          <a:ln>
+            <a:noFill/>
+          </a:ln>
+        </p:spPr>
+        <p:txBody>
+          <a:bodyPr spcFirstLastPara="1" wrap="square" lIns="91425" tIns="45700" rIns="91425" bIns="45700" anchor="ctr" anchorCtr="0">
+            <a:noAutofit/>
+          </a:bodyPr>
+          <a:lstStyle/>
+          <a:p>
+            <a:pPr marL="0" marR="0" lvl="0" indent="0" algn="l" rtl="0">
+              <a:lnSpc>
+                <a:spcPct val="100000"/>
+              </a:lnSpc>
+              <a:spcBef>
+                <a:spcPts val="0"/>
+              </a:spcBef>
+              <a:spcAft>
+                <a:spcPts val="0"/>
+              </a:spcAft>
+              <a:buNone/>
+            </a:pPr>
+            <a:endParaRPr sz="1800" b="0" i="0" u="none" dirty="0">
+              <a:solidFill>
+                <a:schemeClr val="dk1"/>
+              </a:solidFill>
+              <a:latin typeface="Arial"/>
+              <a:ea typeface="Arial"/>
+              <a:cs typeface="Arial"/>
+              <a:sym typeface="Arial"/>
+            </a:endParaRPr>
+          </a:p>
+        </p:txBody>
+      </p:sp>
+      <p:sp>
+        <p:nvSpPr>
+          <p:cNvPr id="5" name="Google Shape;128;p4">
+            <a:extLst>
+              <a:ext uri="{FF2B5EF4-FFF2-40B4-BE49-F238E27FC236}">
+                <a16:creationId xmlns:a16="http://schemas.microsoft.com/office/drawing/2014/main" id="{0A496429-6CEE-5E24-0936-E47BDF6F61DC}"/>
+              </a:ext>
+            </a:extLst>
+          </p:cNvPr>
+          <p:cNvSpPr txBox="1"/>
+          <p:nvPr/>
+        </p:nvSpPr>
+        <p:spPr>
+          <a:xfrm>
+            <a:off x="3509962" y="-6350"/>
+            <a:ext cx="5172075" cy="128587"/>
+          </a:xfrm>
+          <a:prstGeom prst="rect">
+            <a:avLst/>
+          </a:prstGeom>
+          <a:solidFill>
+            <a:srgbClr val="381850"/>
+          </a:solidFill>
+          <a:ln>
+            <a:noFill/>
+          </a:ln>
+        </p:spPr>
+        <p:txBody>
+          <a:bodyPr spcFirstLastPara="1" wrap="square" lIns="91425" tIns="45700" rIns="91425" bIns="45700" anchor="ctr" anchorCtr="0">
+            <a:noAutofit/>
+          </a:bodyPr>
+          <a:lstStyle/>
+          <a:p>
+            <a:pPr marL="0" marR="0" lvl="0" indent="0" algn="l" rtl="0">
+              <a:lnSpc>
+                <a:spcPct val="100000"/>
+              </a:lnSpc>
+              <a:spcBef>
+                <a:spcPts val="0"/>
+              </a:spcBef>
+              <a:spcAft>
+                <a:spcPts val="0"/>
+              </a:spcAft>
+              <a:buNone/>
+            </a:pPr>
+            <a:endParaRPr sz="1800" b="0" i="0" u="none" dirty="0">
+              <a:solidFill>
+                <a:schemeClr val="dk1"/>
+              </a:solidFill>
+              <a:latin typeface="Arial"/>
+              <a:ea typeface="Arial"/>
+              <a:cs typeface="Arial"/>
+              <a:sym typeface="Arial"/>
+            </a:endParaRPr>
+          </a:p>
+        </p:txBody>
+      </p:sp>
+      <p:pic>
+        <p:nvPicPr>
+          <p:cNvPr id="7" name="Picture 6">
+            <a:extLst>
+              <a:ext uri="{FF2B5EF4-FFF2-40B4-BE49-F238E27FC236}">
+                <a16:creationId xmlns:a16="http://schemas.microsoft.com/office/drawing/2014/main" id="{9B18C123-3B80-FD6C-9A1B-BB146AE99717}"/>
+              </a:ext>
+            </a:extLst>
+          </p:cNvPr>
+          <p:cNvPicPr>
+            <a:picLocks noChangeAspect="1"/>
+          </p:cNvPicPr>
+          <p:nvPr/>
+        </p:nvPicPr>
+        <p:blipFill>
+          <a:blip r:embed="rId2"/>
+          <a:stretch>
+            <a:fillRect/>
+          </a:stretch>
+        </p:blipFill>
+        <p:spPr>
+          <a:xfrm>
+            <a:off x="324465" y="500249"/>
+            <a:ext cx="11651226" cy="5857502"/>
+          </a:xfrm>
+          <a:prstGeom prst="rect">
+            <a:avLst/>
+          </a:prstGeom>
+        </p:spPr>
+      </p:pic>
+    </p:spTree>
+    <p:extLst>
+      <p:ext uri="{BB962C8B-B14F-4D97-AF65-F5344CB8AC3E}">
+        <p14:creationId xmlns:p14="http://schemas.microsoft.com/office/powerpoint/2010/main" val="3380060394"/>
+      </p:ext>
+    </p:extLst>
+  </p:cSld>
+  <p:clrMapOvr>
+    <a:masterClrMapping/>
+  </p:clrMapOvr>
+</p:sld>
+</file>
+
+<file path=ppt/slides/slide8.xml><?xml version="1.0" encoding="utf-8"?>
 <p:sld xmlns:a="http://schemas.openxmlformats.org/drawingml/2006/main" xmlns:r="http://schemas.openxmlformats.org/officeDocument/2006/relationships" xmlns:p="http://schemas.openxmlformats.org/presentationml/2006/main">
   <p:cSld>
     <p:spTree>
@@ -19909,7 +22336,7 @@
 </p:sld>
 </file>
 
-<file path=ppt/slides/slide6.xml><?xml version="1.0" encoding="utf-8"?>
+<file path=ppt/slides/slide9.xml><?xml version="1.0" encoding="utf-8"?>
 <p:sld xmlns:a="http://schemas.openxmlformats.org/drawingml/2006/main" xmlns:r="http://schemas.openxmlformats.org/officeDocument/2006/relationships" xmlns:p="http://schemas.openxmlformats.org/presentationml/2006/main">
   <p:cSld>
     <p:spTree>
@@ -20952,1541 +23379,6 @@
 </p:sld>
 </file>
 
-<file path=ppt/slides/slide7.xml><?xml version="1.0" encoding="utf-8"?>
-<p:sld xmlns:a="http://schemas.openxmlformats.org/drawingml/2006/main" xmlns:r="http://schemas.openxmlformats.org/officeDocument/2006/relationships" xmlns:p="http://schemas.openxmlformats.org/presentationml/2006/main">
-  <p:cSld>
-    <p:spTree>
-      <p:nvGrpSpPr>
-        <p:cNvPr id="1" name="Shape 150"/>
-        <p:cNvGrpSpPr/>
-        <p:nvPr/>
-      </p:nvGrpSpPr>
-      <p:grpSpPr>
-        <a:xfrm>
-          <a:off x="0" y="0"/>
-          <a:ext cx="0" cy="0"/>
-          <a:chOff x="0" y="0"/>
-          <a:chExt cx="0" cy="0"/>
-        </a:xfrm>
-      </p:grpSpPr>
-      <p:sp>
-        <p:nvSpPr>
-          <p:cNvPr id="151" name="Google Shape;151;p7"/>
-          <p:cNvSpPr txBox="1"/>
-          <p:nvPr/>
-        </p:nvSpPr>
-        <p:spPr>
-          <a:xfrm>
-            <a:off x="0" y="6632575"/>
-            <a:ext cx="12192000" cy="225425"/>
-          </a:xfrm>
-          <a:prstGeom prst="rect">
-            <a:avLst/>
-          </a:prstGeom>
-          <a:solidFill>
-            <a:srgbClr val="381850"/>
-          </a:solidFill>
-          <a:ln>
-            <a:noFill/>
-          </a:ln>
-        </p:spPr>
-        <p:txBody>
-          <a:bodyPr spcFirstLastPara="1" wrap="square" lIns="91425" tIns="45700" rIns="91425" bIns="45700" anchor="ctr" anchorCtr="0">
-            <a:noAutofit/>
-          </a:bodyPr>
-          <a:lstStyle/>
-          <a:p>
-            <a:pPr marL="0" marR="0" lvl="0" indent="0" algn="l" rtl="0">
-              <a:lnSpc>
-                <a:spcPct val="100000"/>
-              </a:lnSpc>
-              <a:spcBef>
-                <a:spcPts val="0"/>
-              </a:spcBef>
-              <a:spcAft>
-                <a:spcPts val="0"/>
-              </a:spcAft>
-              <a:buNone/>
-            </a:pPr>
-            <a:endParaRPr sz="1800" b="0" i="0" u="none">
-              <a:solidFill>
-                <a:schemeClr val="dk1"/>
-              </a:solidFill>
-              <a:latin typeface="Arial"/>
-              <a:ea typeface="Arial"/>
-              <a:cs typeface="Arial"/>
-              <a:sym typeface="Arial"/>
-            </a:endParaRPr>
-          </a:p>
-        </p:txBody>
-      </p:sp>
-      <p:sp>
-        <p:nvSpPr>
-          <p:cNvPr id="152" name="Google Shape;152;p7"/>
-          <p:cNvSpPr txBox="1"/>
-          <p:nvPr/>
-        </p:nvSpPr>
-        <p:spPr>
-          <a:xfrm>
-            <a:off x="3509962" y="-6350"/>
-            <a:ext cx="5172075" cy="128587"/>
-          </a:xfrm>
-          <a:prstGeom prst="rect">
-            <a:avLst/>
-          </a:prstGeom>
-          <a:solidFill>
-            <a:srgbClr val="381850"/>
-          </a:solidFill>
-          <a:ln>
-            <a:noFill/>
-          </a:ln>
-        </p:spPr>
-        <p:txBody>
-          <a:bodyPr spcFirstLastPara="1" wrap="square" lIns="91425" tIns="45700" rIns="91425" bIns="45700" anchor="ctr" anchorCtr="0">
-            <a:noAutofit/>
-          </a:bodyPr>
-          <a:lstStyle/>
-          <a:p>
-            <a:pPr marL="0" marR="0" lvl="0" indent="0" algn="l" rtl="0">
-              <a:lnSpc>
-                <a:spcPct val="100000"/>
-              </a:lnSpc>
-              <a:spcBef>
-                <a:spcPts val="0"/>
-              </a:spcBef>
-              <a:spcAft>
-                <a:spcPts val="0"/>
-              </a:spcAft>
-              <a:buNone/>
-            </a:pPr>
-            <a:endParaRPr sz="1800" b="0" i="0" u="none">
-              <a:solidFill>
-                <a:schemeClr val="dk1"/>
-              </a:solidFill>
-              <a:latin typeface="Arial"/>
-              <a:ea typeface="Arial"/>
-              <a:cs typeface="Arial"/>
-              <a:sym typeface="Arial"/>
-            </a:endParaRPr>
-          </a:p>
-        </p:txBody>
-      </p:sp>
-      <p:sp>
-        <p:nvSpPr>
-          <p:cNvPr id="153" name="Google Shape;153;p7"/>
-          <p:cNvSpPr txBox="1"/>
-          <p:nvPr/>
-        </p:nvSpPr>
-        <p:spPr>
-          <a:xfrm>
-            <a:off x="992187" y="382587"/>
-            <a:ext cx="10207625" cy="584200"/>
-          </a:xfrm>
-          <a:prstGeom prst="rect">
-            <a:avLst/>
-          </a:prstGeom>
-          <a:noFill/>
-          <a:ln>
-            <a:noFill/>
-          </a:ln>
-        </p:spPr>
-        <p:txBody>
-          <a:bodyPr spcFirstLastPara="1" wrap="square" lIns="91425" tIns="45700" rIns="91425" bIns="45700" anchor="t" anchorCtr="0">
-            <a:spAutoFit/>
-          </a:bodyPr>
-          <a:lstStyle/>
-          <a:p>
-            <a:pPr marL="0" marR="0" lvl="0" indent="0" algn="ctr" rtl="0">
-              <a:lnSpc>
-                <a:spcPct val="100000"/>
-              </a:lnSpc>
-              <a:spcBef>
-                <a:spcPts val="0"/>
-              </a:spcBef>
-              <a:spcAft>
-                <a:spcPts val="0"/>
-              </a:spcAft>
-              <a:buClr>
-                <a:schemeClr val="dk1"/>
-              </a:buClr>
-              <a:buSzPts val="3200"/>
-              <a:buFont typeface="Georgia"/>
-              <a:buNone/>
-            </a:pPr>
-            <a:r>
-              <a:rPr lang="en-US" sz="3200" b="0" i="0" u="none">
-                <a:solidFill>
-                  <a:schemeClr val="dk1"/>
-                </a:solidFill>
-                <a:latin typeface="Georgia"/>
-                <a:ea typeface="Georgia"/>
-                <a:cs typeface="Georgia"/>
-                <a:sym typeface="Georgia"/>
-              </a:rPr>
-              <a:t>LITERATURE REVIEW….</a:t>
-            </a:r>
-            <a:endParaRPr/>
-          </a:p>
-        </p:txBody>
-      </p:sp>
-      <p:graphicFrame>
-        <p:nvGraphicFramePr>
-          <p:cNvPr id="154" name="Google Shape;154;p7"/>
-          <p:cNvGraphicFramePr/>
-          <p:nvPr>
-            <p:extLst>
-              <p:ext uri="{D42A27DB-BD31-4B8C-83A1-F6EECF244321}">
-                <p14:modId xmlns:p14="http://schemas.microsoft.com/office/powerpoint/2010/main" val="431874334"/>
-              </p:ext>
-            </p:extLst>
-          </p:nvPr>
-        </p:nvGraphicFramePr>
-        <p:xfrm>
-          <a:off x="996950" y="1330325"/>
-          <a:ext cx="10585450" cy="4824400"/>
-        </p:xfrm>
-        <a:graphic>
-          <a:graphicData uri="http://schemas.openxmlformats.org/drawingml/2006/table">
-            <a:tbl>
-              <a:tblPr>
-                <a:noFill/>
-                <a:tableStyleId>{7F5DC531-3BBC-4B7F-937C-E1510FDDE53F}</a:tableStyleId>
-              </a:tblPr>
-              <a:tblGrid>
-                <a:gridCol w="755650">
-                  <a:extLst>
-                    <a:ext uri="{9D8B030D-6E8A-4147-A177-3AD203B41FA5}">
-                      <a16:colId xmlns:a16="http://schemas.microsoft.com/office/drawing/2014/main" val="20000"/>
-                    </a:ext>
-                  </a:extLst>
-                </a:gridCol>
-                <a:gridCol w="5353050">
-                  <a:extLst>
-                    <a:ext uri="{9D8B030D-6E8A-4147-A177-3AD203B41FA5}">
-                      <a16:colId xmlns:a16="http://schemas.microsoft.com/office/drawing/2014/main" val="20001"/>
-                    </a:ext>
-                  </a:extLst>
-                </a:gridCol>
-                <a:gridCol w="4476750">
-                  <a:extLst>
-                    <a:ext uri="{9D8B030D-6E8A-4147-A177-3AD203B41FA5}">
-                      <a16:colId xmlns:a16="http://schemas.microsoft.com/office/drawing/2014/main" val="20002"/>
-                    </a:ext>
-                  </a:extLst>
-                </a:gridCol>
-              </a:tblGrid>
-              <a:tr h="1076325">
-                <a:tc>
-                  <a:txBody>
-                    <a:bodyPr/>
-                    <a:lstStyle/>
-                    <a:p>
-                      <a:pPr marL="0" marR="0" lvl="0" indent="0" algn="ctr" rtl="0">
-                        <a:lnSpc>
-                          <a:spcPct val="100000"/>
-                        </a:lnSpc>
-                        <a:spcBef>
-                          <a:spcPts val="0"/>
-                        </a:spcBef>
-                        <a:spcAft>
-                          <a:spcPts val="0"/>
-                        </a:spcAft>
-                        <a:buClr>
-                          <a:schemeClr val="dk1"/>
-                        </a:buClr>
-                        <a:buSzPts val="1800"/>
-                        <a:buFont typeface="Calibri"/>
-                        <a:buNone/>
-                      </a:pPr>
-                      <a:endParaRPr sz="1800" b="1" i="0" u="none">
-                        <a:solidFill>
-                          <a:srgbClr val="FFFFFF"/>
-                        </a:solidFill>
-                        <a:latin typeface="Calibri"/>
-                        <a:ea typeface="Calibri"/>
-                        <a:cs typeface="Calibri"/>
-                        <a:sym typeface="Calibri"/>
-                      </a:endParaRPr>
-                    </a:p>
-                    <a:p>
-                      <a:pPr marL="0" marR="0" lvl="0" indent="0" algn="ctr" rtl="0">
-                        <a:lnSpc>
-                          <a:spcPct val="100000"/>
-                        </a:lnSpc>
-                        <a:spcBef>
-                          <a:spcPts val="0"/>
-                        </a:spcBef>
-                        <a:spcAft>
-                          <a:spcPts val="0"/>
-                        </a:spcAft>
-                        <a:buClr>
-                          <a:srgbClr val="FFFFFF"/>
-                        </a:buClr>
-                        <a:buSzPts val="1800"/>
-                        <a:buFont typeface="Calibri"/>
-                        <a:buNone/>
-                      </a:pPr>
-                      <a:r>
-                        <a:rPr lang="en-US" sz="1800" b="1" i="0" u="none">
-                          <a:solidFill>
-                            <a:srgbClr val="FFFFFF"/>
-                          </a:solidFill>
-                          <a:latin typeface="Calibri"/>
-                          <a:ea typeface="Calibri"/>
-                          <a:cs typeface="Calibri"/>
-                          <a:sym typeface="Calibri"/>
-                        </a:rPr>
-                        <a:t>S.No</a:t>
-                      </a:r>
-                      <a:endParaRPr/>
-                    </a:p>
-                  </a:txBody>
-                  <a:tcPr marL="91450" marR="91450" marT="45725" marB="45725">
-                    <a:lnL w="12700" cap="flat" cmpd="sng">
-                      <a:solidFill>
-                        <a:schemeClr val="lt1"/>
-                      </a:solidFill>
-                      <a:prstDash val="solid"/>
-                      <a:round/>
-                      <a:headEnd type="none" w="sm" len="sm"/>
-                      <a:tailEnd type="none" w="sm" len="sm"/>
-                    </a:lnL>
-                    <a:lnR w="12700" cap="flat" cmpd="sng">
-                      <a:solidFill>
-                        <a:schemeClr val="lt1"/>
-                      </a:solidFill>
-                      <a:prstDash val="solid"/>
-                      <a:round/>
-                      <a:headEnd type="none" w="sm" len="sm"/>
-                      <a:tailEnd type="none" w="sm" len="sm"/>
-                    </a:lnR>
-                    <a:lnT w="12700" cap="flat" cmpd="sng">
-                      <a:solidFill>
-                        <a:schemeClr val="lt1"/>
-                      </a:solidFill>
-                      <a:prstDash val="solid"/>
-                      <a:round/>
-                      <a:headEnd type="none" w="sm" len="sm"/>
-                      <a:tailEnd type="none" w="sm" len="sm"/>
-                    </a:lnT>
-                    <a:lnB w="38100" cap="flat" cmpd="sng">
-                      <a:solidFill>
-                        <a:schemeClr val="lt1"/>
-                      </a:solidFill>
-                      <a:prstDash val="solid"/>
-                      <a:round/>
-                      <a:headEnd type="none" w="sm" len="sm"/>
-                      <a:tailEnd type="none" w="sm" len="sm"/>
-                    </a:lnB>
-                    <a:solidFill>
-                      <a:schemeClr val="accent1"/>
-                    </a:solidFill>
-                  </a:tcPr>
-                </a:tc>
-                <a:tc>
-                  <a:txBody>
-                    <a:bodyPr/>
-                    <a:lstStyle/>
-                    <a:p>
-                      <a:pPr marL="0" marR="0" lvl="0" indent="0" algn="ctr" rtl="0">
-                        <a:lnSpc>
-                          <a:spcPct val="100000"/>
-                        </a:lnSpc>
-                        <a:spcBef>
-                          <a:spcPts val="0"/>
-                        </a:spcBef>
-                        <a:spcAft>
-                          <a:spcPts val="0"/>
-                        </a:spcAft>
-                        <a:buClr>
-                          <a:schemeClr val="dk1"/>
-                        </a:buClr>
-                        <a:buSzPts val="1800"/>
-                        <a:buFont typeface="Calibri"/>
-                        <a:buNone/>
-                      </a:pPr>
-                      <a:endParaRPr sz="1800" b="1" i="0" u="none">
-                        <a:solidFill>
-                          <a:srgbClr val="FFFFFF"/>
-                        </a:solidFill>
-                        <a:latin typeface="Calibri"/>
-                        <a:ea typeface="Calibri"/>
-                        <a:cs typeface="Calibri"/>
-                        <a:sym typeface="Calibri"/>
-                      </a:endParaRPr>
-                    </a:p>
-                    <a:p>
-                      <a:pPr marL="0" marR="0" lvl="0" indent="0" algn="ctr" rtl="0">
-                        <a:lnSpc>
-                          <a:spcPct val="100000"/>
-                        </a:lnSpc>
-                        <a:spcBef>
-                          <a:spcPts val="0"/>
-                        </a:spcBef>
-                        <a:spcAft>
-                          <a:spcPts val="0"/>
-                        </a:spcAft>
-                        <a:buClr>
-                          <a:srgbClr val="FFFFFF"/>
-                        </a:buClr>
-                        <a:buSzPts val="1800"/>
-                        <a:buFont typeface="Calibri"/>
-                        <a:buNone/>
-                      </a:pPr>
-                      <a:r>
-                        <a:rPr lang="en-US" sz="1800" b="1" i="0" u="none">
-                          <a:solidFill>
-                            <a:srgbClr val="FFFFFF"/>
-                          </a:solidFill>
-                          <a:latin typeface="Calibri"/>
-                          <a:ea typeface="Calibri"/>
-                          <a:cs typeface="Calibri"/>
-                          <a:sym typeface="Calibri"/>
-                        </a:rPr>
-                        <a:t>ARTICLE TITLE &amp; PUBLICATION DETAIL</a:t>
-                      </a:r>
-                      <a:endParaRPr/>
-                    </a:p>
-                  </a:txBody>
-                  <a:tcPr marL="91450" marR="91450" marT="45725" marB="45725">
-                    <a:lnL w="12700" cap="flat" cmpd="sng">
-                      <a:solidFill>
-                        <a:schemeClr val="lt1"/>
-                      </a:solidFill>
-                      <a:prstDash val="solid"/>
-                      <a:round/>
-                      <a:headEnd type="none" w="sm" len="sm"/>
-                      <a:tailEnd type="none" w="sm" len="sm"/>
-                    </a:lnL>
-                    <a:lnR w="12700" cap="flat" cmpd="sng">
-                      <a:solidFill>
-                        <a:schemeClr val="lt1"/>
-                      </a:solidFill>
-                      <a:prstDash val="solid"/>
-                      <a:round/>
-                      <a:headEnd type="none" w="sm" len="sm"/>
-                      <a:tailEnd type="none" w="sm" len="sm"/>
-                    </a:lnR>
-                    <a:lnT w="12700" cap="flat" cmpd="sng">
-                      <a:solidFill>
-                        <a:schemeClr val="lt1"/>
-                      </a:solidFill>
-                      <a:prstDash val="solid"/>
-                      <a:round/>
-                      <a:headEnd type="none" w="sm" len="sm"/>
-                      <a:tailEnd type="none" w="sm" len="sm"/>
-                    </a:lnT>
-                    <a:lnB w="38100" cap="flat" cmpd="sng">
-                      <a:solidFill>
-                        <a:schemeClr val="lt1"/>
-                      </a:solidFill>
-                      <a:prstDash val="solid"/>
-                      <a:round/>
-                      <a:headEnd type="none" w="sm" len="sm"/>
-                      <a:tailEnd type="none" w="sm" len="sm"/>
-                    </a:lnB>
-                    <a:solidFill>
-                      <a:schemeClr val="accent1"/>
-                    </a:solidFill>
-                  </a:tcPr>
-                </a:tc>
-                <a:tc>
-                  <a:txBody>
-                    <a:bodyPr/>
-                    <a:lstStyle/>
-                    <a:p>
-                      <a:pPr marL="0" marR="0" lvl="0" indent="0" algn="ctr" rtl="0">
-                        <a:lnSpc>
-                          <a:spcPct val="100000"/>
-                        </a:lnSpc>
-                        <a:spcBef>
-                          <a:spcPts val="0"/>
-                        </a:spcBef>
-                        <a:spcAft>
-                          <a:spcPts val="0"/>
-                        </a:spcAft>
-                        <a:buClr>
-                          <a:schemeClr val="dk1"/>
-                        </a:buClr>
-                        <a:buSzPts val="1800"/>
-                        <a:buFont typeface="Calibri"/>
-                        <a:buNone/>
-                      </a:pPr>
-                      <a:endParaRPr sz="1800" b="1" i="0" u="none">
-                        <a:solidFill>
-                          <a:srgbClr val="FFFFFF"/>
-                        </a:solidFill>
-                        <a:latin typeface="Calibri"/>
-                        <a:ea typeface="Calibri"/>
-                        <a:cs typeface="Calibri"/>
-                        <a:sym typeface="Calibri"/>
-                      </a:endParaRPr>
-                    </a:p>
-                    <a:p>
-                      <a:pPr marL="0" marR="0" lvl="0" indent="0" algn="ctr" rtl="0">
-                        <a:lnSpc>
-                          <a:spcPct val="100000"/>
-                        </a:lnSpc>
-                        <a:spcBef>
-                          <a:spcPts val="0"/>
-                        </a:spcBef>
-                        <a:spcAft>
-                          <a:spcPts val="0"/>
-                        </a:spcAft>
-                        <a:buClr>
-                          <a:srgbClr val="FFFFFF"/>
-                        </a:buClr>
-                        <a:buSzPts val="1800"/>
-                        <a:buFont typeface="Calibri"/>
-                        <a:buNone/>
-                      </a:pPr>
-                      <a:r>
-                        <a:rPr lang="en-US" sz="1800" b="1" i="0" u="none">
-                          <a:solidFill>
-                            <a:srgbClr val="FFFFFF"/>
-                          </a:solidFill>
-                          <a:latin typeface="Calibri"/>
-                          <a:ea typeface="Calibri"/>
-                          <a:cs typeface="Calibri"/>
-                          <a:sym typeface="Calibri"/>
-                        </a:rPr>
-                        <a:t>METHODOLOGY USED</a:t>
-                      </a:r>
-                      <a:endParaRPr/>
-                    </a:p>
-                  </a:txBody>
-                  <a:tcPr marL="91450" marR="91450" marT="45725" marB="45725">
-                    <a:lnL w="12700" cap="flat" cmpd="sng">
-                      <a:solidFill>
-                        <a:schemeClr val="lt1"/>
-                      </a:solidFill>
-                      <a:prstDash val="solid"/>
-                      <a:round/>
-                      <a:headEnd type="none" w="sm" len="sm"/>
-                      <a:tailEnd type="none" w="sm" len="sm"/>
-                    </a:lnL>
-                    <a:lnR w="12700" cap="flat" cmpd="sng">
-                      <a:solidFill>
-                        <a:schemeClr val="lt1"/>
-                      </a:solidFill>
-                      <a:prstDash val="solid"/>
-                      <a:round/>
-                      <a:headEnd type="none" w="sm" len="sm"/>
-                      <a:tailEnd type="none" w="sm" len="sm"/>
-                    </a:lnR>
-                    <a:lnT w="12700" cap="flat" cmpd="sng">
-                      <a:solidFill>
-                        <a:schemeClr val="lt1"/>
-                      </a:solidFill>
-                      <a:prstDash val="solid"/>
-                      <a:round/>
-                      <a:headEnd type="none" w="sm" len="sm"/>
-                      <a:tailEnd type="none" w="sm" len="sm"/>
-                    </a:lnT>
-                    <a:lnB w="38100" cap="flat" cmpd="sng">
-                      <a:solidFill>
-                        <a:schemeClr val="lt1"/>
-                      </a:solidFill>
-                      <a:prstDash val="solid"/>
-                      <a:round/>
-                      <a:headEnd type="none" w="sm" len="sm"/>
-                      <a:tailEnd type="none" w="sm" len="sm"/>
-                    </a:lnB>
-                    <a:solidFill>
-                      <a:schemeClr val="accent1"/>
-                    </a:solidFill>
-                  </a:tcPr>
-                </a:tc>
-                <a:extLst>
-                  <a:ext uri="{0D108BD9-81ED-4DB2-BD59-A6C34878D82A}">
-                    <a16:rowId xmlns:a16="http://schemas.microsoft.com/office/drawing/2014/main" val="10000"/>
-                  </a:ext>
-                </a:extLst>
-              </a:tr>
-              <a:tr h="1462075">
-                <a:tc>
-                  <a:txBody>
-                    <a:bodyPr/>
-                    <a:lstStyle/>
-                    <a:p>
-                      <a:pPr marL="0" marR="0" lvl="0" indent="0" algn="l" rtl="0">
-                        <a:lnSpc>
-                          <a:spcPct val="100000"/>
-                        </a:lnSpc>
-                        <a:spcBef>
-                          <a:spcPts val="0"/>
-                        </a:spcBef>
-                        <a:spcAft>
-                          <a:spcPts val="0"/>
-                        </a:spcAft>
-                        <a:buClr>
-                          <a:srgbClr val="000000"/>
-                        </a:buClr>
-                        <a:buSzPts val="1800"/>
-                        <a:buFont typeface="Calibri"/>
-                        <a:buNone/>
-                      </a:pPr>
-                      <a:r>
-                        <a:rPr lang="en-US" sz="1800" b="0" i="0" u="none">
-                          <a:solidFill>
-                            <a:srgbClr val="000000"/>
-                          </a:solidFill>
-                          <a:latin typeface="Calibri"/>
-                          <a:ea typeface="Calibri"/>
-                          <a:cs typeface="Calibri"/>
-                          <a:sym typeface="Calibri"/>
-                        </a:rPr>
-                        <a:t>5</a:t>
-                      </a:r>
-                      <a:endParaRPr/>
-                    </a:p>
-                  </a:txBody>
-                  <a:tcPr marL="91450" marR="91450" marT="45725" marB="45725">
-                    <a:lnL w="12700" cap="flat" cmpd="sng">
-                      <a:solidFill>
-                        <a:schemeClr val="lt1"/>
-                      </a:solidFill>
-                      <a:prstDash val="solid"/>
-                      <a:round/>
-                      <a:headEnd type="none" w="sm" len="sm"/>
-                      <a:tailEnd type="none" w="sm" len="sm"/>
-                    </a:lnL>
-                    <a:lnR w="12700" cap="flat" cmpd="sng">
-                      <a:solidFill>
-                        <a:schemeClr val="lt1"/>
-                      </a:solidFill>
-                      <a:prstDash val="solid"/>
-                      <a:round/>
-                      <a:headEnd type="none" w="sm" len="sm"/>
-                      <a:tailEnd type="none" w="sm" len="sm"/>
-                    </a:lnR>
-                    <a:lnT w="38100" cap="flat" cmpd="sng">
-                      <a:solidFill>
-                        <a:schemeClr val="lt1"/>
-                      </a:solidFill>
-                      <a:prstDash val="solid"/>
-                      <a:round/>
-                      <a:headEnd type="none" w="sm" len="sm"/>
-                      <a:tailEnd type="none" w="sm" len="sm"/>
-                    </a:lnT>
-                    <a:lnB w="12700" cap="flat" cmpd="sng">
-                      <a:solidFill>
-                        <a:schemeClr val="lt1"/>
-                      </a:solidFill>
-                      <a:prstDash val="solid"/>
-                      <a:round/>
-                      <a:headEnd type="none" w="sm" len="sm"/>
-                      <a:tailEnd type="none" w="sm" len="sm"/>
-                    </a:lnB>
-                    <a:solidFill>
-                      <a:srgbClr val="FACED1"/>
-                    </a:solidFill>
-                  </a:tcPr>
-                </a:tc>
-                <a:tc>
-                  <a:txBody>
-                    <a:bodyPr/>
-                    <a:lstStyle/>
-                    <a:p>
-                      <a:pPr marL="0" marR="0" lvl="0" indent="0" algn="l" rtl="0">
-                        <a:spcBef>
-                          <a:spcPts val="0"/>
-                        </a:spcBef>
-                        <a:spcAft>
-                          <a:spcPts val="0"/>
-                        </a:spcAft>
-                        <a:buNone/>
-                      </a:pPr>
-                      <a:r>
-                        <a:rPr lang="en-IN" sz="2400" dirty="0"/>
-                        <a:t>Digital Twin-Based Fault Diagnosis and Predictive Maintenance for Industrial Systems</a:t>
-                      </a:r>
-                      <a:endParaRPr sz="2400" b="0" i="0" u="none" dirty="0">
-                        <a:solidFill>
-                          <a:srgbClr val="000000"/>
-                        </a:solidFill>
-                        <a:latin typeface="Calibri"/>
-                        <a:ea typeface="Calibri"/>
-                        <a:cs typeface="Calibri"/>
-                        <a:sym typeface="Calibri"/>
-                      </a:endParaRPr>
-                    </a:p>
-                  </a:txBody>
-                  <a:tcPr marL="91450" marR="91450" marT="45725" marB="45725">
-                    <a:lnL w="12700" cap="flat" cmpd="sng">
-                      <a:solidFill>
-                        <a:schemeClr val="lt1"/>
-                      </a:solidFill>
-                      <a:prstDash val="solid"/>
-                      <a:round/>
-                      <a:headEnd type="none" w="sm" len="sm"/>
-                      <a:tailEnd type="none" w="sm" len="sm"/>
-                    </a:lnL>
-                    <a:lnR w="12700" cap="flat" cmpd="sng">
-                      <a:solidFill>
-                        <a:schemeClr val="lt1"/>
-                      </a:solidFill>
-                      <a:prstDash val="solid"/>
-                      <a:round/>
-                      <a:headEnd type="none" w="sm" len="sm"/>
-                      <a:tailEnd type="none" w="sm" len="sm"/>
-                    </a:lnR>
-                    <a:lnT w="38100" cap="flat" cmpd="sng">
-                      <a:solidFill>
-                        <a:schemeClr val="lt1"/>
-                      </a:solidFill>
-                      <a:prstDash val="solid"/>
-                      <a:round/>
-                      <a:headEnd type="none" w="sm" len="sm"/>
-                      <a:tailEnd type="none" w="sm" len="sm"/>
-                    </a:lnT>
-                    <a:lnB w="12700" cap="flat" cmpd="sng">
-                      <a:solidFill>
-                        <a:schemeClr val="lt1"/>
-                      </a:solidFill>
-                      <a:prstDash val="solid"/>
-                      <a:round/>
-                      <a:headEnd type="none" w="sm" len="sm"/>
-                      <a:tailEnd type="none" w="sm" len="sm"/>
-                    </a:lnB>
-                    <a:solidFill>
-                      <a:srgbClr val="FACED1"/>
-                    </a:solidFill>
-                  </a:tcPr>
-                </a:tc>
-                <a:tc>
-                  <a:txBody>
-                    <a:bodyPr/>
-                    <a:lstStyle/>
-                    <a:p>
-                      <a:pPr marL="0" marR="0" lvl="0" indent="0" algn="l" rtl="0">
-                        <a:lnSpc>
-                          <a:spcPct val="100000"/>
-                        </a:lnSpc>
-                        <a:spcBef>
-                          <a:spcPts val="0"/>
-                        </a:spcBef>
-                        <a:spcAft>
-                          <a:spcPts val="0"/>
-                        </a:spcAft>
-                        <a:buClr>
-                          <a:srgbClr val="000000"/>
-                        </a:buClr>
-                        <a:buSzPts val="1800"/>
-                        <a:buFont typeface="Calibri"/>
-                        <a:buNone/>
-                      </a:pPr>
-                      <a:r>
-                        <a:rPr lang="en-IN" sz="2400" dirty="0"/>
-                        <a:t>Digital Twin, IoT sensors, real-time monitoring, predictive maintenance</a:t>
-                      </a:r>
-                      <a:endParaRPr sz="2400" dirty="0"/>
-                    </a:p>
-                  </a:txBody>
-                  <a:tcPr marL="91450" marR="91450" marT="45725" marB="45725">
-                    <a:lnL w="12700" cap="flat" cmpd="sng">
-                      <a:solidFill>
-                        <a:schemeClr val="lt1"/>
-                      </a:solidFill>
-                      <a:prstDash val="solid"/>
-                      <a:round/>
-                      <a:headEnd type="none" w="sm" len="sm"/>
-                      <a:tailEnd type="none" w="sm" len="sm"/>
-                    </a:lnL>
-                    <a:lnR w="12700" cap="flat" cmpd="sng">
-                      <a:solidFill>
-                        <a:schemeClr val="lt1"/>
-                      </a:solidFill>
-                      <a:prstDash val="solid"/>
-                      <a:round/>
-                      <a:headEnd type="none" w="sm" len="sm"/>
-                      <a:tailEnd type="none" w="sm" len="sm"/>
-                    </a:lnR>
-                    <a:lnT w="38100" cap="flat" cmpd="sng">
-                      <a:solidFill>
-                        <a:schemeClr val="lt1"/>
-                      </a:solidFill>
-                      <a:prstDash val="solid"/>
-                      <a:round/>
-                      <a:headEnd type="none" w="sm" len="sm"/>
-                      <a:tailEnd type="none" w="sm" len="sm"/>
-                    </a:lnT>
-                    <a:lnB w="12700" cap="flat" cmpd="sng">
-                      <a:solidFill>
-                        <a:schemeClr val="lt1"/>
-                      </a:solidFill>
-                      <a:prstDash val="solid"/>
-                      <a:round/>
-                      <a:headEnd type="none" w="sm" len="sm"/>
-                      <a:tailEnd type="none" w="sm" len="sm"/>
-                    </a:lnB>
-                    <a:solidFill>
-                      <a:srgbClr val="FACED1"/>
-                    </a:solidFill>
-                  </a:tcPr>
-                </a:tc>
-                <a:extLst>
-                  <a:ext uri="{0D108BD9-81ED-4DB2-BD59-A6C34878D82A}">
-                    <a16:rowId xmlns:a16="http://schemas.microsoft.com/office/drawing/2014/main" val="10001"/>
-                  </a:ext>
-                </a:extLst>
-              </a:tr>
-              <a:tr h="2286000">
-                <a:tc>
-                  <a:txBody>
-                    <a:bodyPr/>
-                    <a:lstStyle/>
-                    <a:p>
-                      <a:pPr marL="0" marR="0" lvl="0" indent="0" algn="l" rtl="0">
-                        <a:lnSpc>
-                          <a:spcPct val="100000"/>
-                        </a:lnSpc>
-                        <a:spcBef>
-                          <a:spcPts val="0"/>
-                        </a:spcBef>
-                        <a:spcAft>
-                          <a:spcPts val="0"/>
-                        </a:spcAft>
-                        <a:buClr>
-                          <a:srgbClr val="000000"/>
-                        </a:buClr>
-                        <a:buSzPts val="1800"/>
-                        <a:buFont typeface="Calibri"/>
-                        <a:buNone/>
-                      </a:pPr>
-                      <a:r>
-                        <a:rPr lang="en-US" sz="1800" b="0" i="0" u="none">
-                          <a:solidFill>
-                            <a:srgbClr val="000000"/>
-                          </a:solidFill>
-                          <a:latin typeface="Calibri"/>
-                          <a:ea typeface="Calibri"/>
-                          <a:cs typeface="Calibri"/>
-                          <a:sym typeface="Calibri"/>
-                        </a:rPr>
-                        <a:t>6</a:t>
-                      </a:r>
-                      <a:endParaRPr/>
-                    </a:p>
-                  </a:txBody>
-                  <a:tcPr marL="91450" marR="91450" marT="45725" marB="45725">
-                    <a:lnL w="12700" cap="flat" cmpd="sng">
-                      <a:solidFill>
-                        <a:schemeClr val="lt1"/>
-                      </a:solidFill>
-                      <a:prstDash val="solid"/>
-                      <a:round/>
-                      <a:headEnd type="none" w="sm" len="sm"/>
-                      <a:tailEnd type="none" w="sm" len="sm"/>
-                    </a:lnL>
-                    <a:lnR w="12700" cap="flat" cmpd="sng">
-                      <a:solidFill>
-                        <a:schemeClr val="lt1"/>
-                      </a:solidFill>
-                      <a:prstDash val="solid"/>
-                      <a:round/>
-                      <a:headEnd type="none" w="sm" len="sm"/>
-                      <a:tailEnd type="none" w="sm" len="sm"/>
-                    </a:lnR>
-                    <a:lnT w="12700" cap="flat" cmpd="sng">
-                      <a:solidFill>
-                        <a:schemeClr val="lt1"/>
-                      </a:solidFill>
-                      <a:prstDash val="solid"/>
-                      <a:round/>
-                      <a:headEnd type="none" w="sm" len="sm"/>
-                      <a:tailEnd type="none" w="sm" len="sm"/>
-                    </a:lnT>
-                    <a:lnB w="12700" cap="flat" cmpd="sng">
-                      <a:solidFill>
-                        <a:schemeClr val="lt1"/>
-                      </a:solidFill>
-                      <a:prstDash val="solid"/>
-                      <a:round/>
-                      <a:headEnd type="none" w="sm" len="sm"/>
-                      <a:tailEnd type="none" w="sm" len="sm"/>
-                    </a:lnB>
-                    <a:solidFill>
-                      <a:srgbClr val="FCE8EA"/>
-                    </a:solidFill>
-                  </a:tcPr>
-                </a:tc>
-                <a:tc>
-                  <a:txBody>
-                    <a:bodyPr/>
-                    <a:lstStyle/>
-                    <a:p>
-                      <a:pPr marL="0" marR="0" lvl="0" indent="0" algn="l" rtl="0">
-                        <a:spcBef>
-                          <a:spcPts val="0"/>
-                        </a:spcBef>
-                        <a:spcAft>
-                          <a:spcPts val="0"/>
-                        </a:spcAft>
-                        <a:buNone/>
-                      </a:pPr>
-                      <a:r>
-                        <a:rPr lang="en-IN" sz="2400" dirty="0"/>
-                        <a:t>AI-Based Intelligent Condition Monitoring of Elevator Systems</a:t>
-                      </a:r>
-                      <a:endParaRPr sz="2400" b="0" i="0" u="none" dirty="0">
-                        <a:solidFill>
-                          <a:srgbClr val="000000"/>
-                        </a:solidFill>
-                        <a:latin typeface="Calibri"/>
-                        <a:ea typeface="Calibri"/>
-                        <a:cs typeface="Calibri"/>
-                        <a:sym typeface="Calibri"/>
-                      </a:endParaRPr>
-                    </a:p>
-                  </a:txBody>
-                  <a:tcPr marL="91450" marR="91450" marT="45725" marB="45725">
-                    <a:lnL w="12700" cap="flat" cmpd="sng">
-                      <a:solidFill>
-                        <a:schemeClr val="lt1"/>
-                      </a:solidFill>
-                      <a:prstDash val="solid"/>
-                      <a:round/>
-                      <a:headEnd type="none" w="sm" len="sm"/>
-                      <a:tailEnd type="none" w="sm" len="sm"/>
-                    </a:lnL>
-                    <a:lnR w="12700" cap="flat" cmpd="sng">
-                      <a:solidFill>
-                        <a:schemeClr val="lt1"/>
-                      </a:solidFill>
-                      <a:prstDash val="solid"/>
-                      <a:round/>
-                      <a:headEnd type="none" w="sm" len="sm"/>
-                      <a:tailEnd type="none" w="sm" len="sm"/>
-                    </a:lnR>
-                    <a:lnT w="12700" cap="flat" cmpd="sng">
-                      <a:solidFill>
-                        <a:schemeClr val="lt1"/>
-                      </a:solidFill>
-                      <a:prstDash val="solid"/>
-                      <a:round/>
-                      <a:headEnd type="none" w="sm" len="sm"/>
-                      <a:tailEnd type="none" w="sm" len="sm"/>
-                    </a:lnT>
-                    <a:lnB w="12700" cap="flat" cmpd="sng">
-                      <a:solidFill>
-                        <a:schemeClr val="lt1"/>
-                      </a:solidFill>
-                      <a:prstDash val="solid"/>
-                      <a:round/>
-                      <a:headEnd type="none" w="sm" len="sm"/>
-                      <a:tailEnd type="none" w="sm" len="sm"/>
-                    </a:lnB>
-                    <a:solidFill>
-                      <a:srgbClr val="FCE8EA"/>
-                    </a:solidFill>
-                  </a:tcPr>
-                </a:tc>
-                <a:tc>
-                  <a:txBody>
-                    <a:bodyPr/>
-                    <a:lstStyle/>
-                    <a:p>
-                      <a:pPr marL="0" marR="0" lvl="0" indent="0" algn="l" rtl="0">
-                        <a:lnSpc>
-                          <a:spcPct val="100000"/>
-                        </a:lnSpc>
-                        <a:spcBef>
-                          <a:spcPts val="0"/>
-                        </a:spcBef>
-                        <a:spcAft>
-                          <a:spcPts val="0"/>
-                        </a:spcAft>
-                        <a:buClr>
-                          <a:srgbClr val="000000"/>
-                        </a:buClr>
-                        <a:buSzPts val="1800"/>
-                        <a:buFont typeface="Calibri"/>
-                        <a:buNone/>
-                      </a:pPr>
-                      <a:r>
-                        <a:rPr lang="en-IN" sz="2400" dirty="0"/>
-                        <a:t>Machine Learning, sensor data analysis, anomaly detection, condition monitoring</a:t>
-                      </a:r>
-                      <a:endParaRPr sz="2400" dirty="0"/>
-                    </a:p>
-                  </a:txBody>
-                  <a:tcPr marL="91450" marR="91450" marT="45725" marB="45725">
-                    <a:lnL w="12700" cap="flat" cmpd="sng">
-                      <a:solidFill>
-                        <a:schemeClr val="lt1"/>
-                      </a:solidFill>
-                      <a:prstDash val="solid"/>
-                      <a:round/>
-                      <a:headEnd type="none" w="sm" len="sm"/>
-                      <a:tailEnd type="none" w="sm" len="sm"/>
-                    </a:lnL>
-                    <a:lnR w="12700" cap="flat" cmpd="sng">
-                      <a:solidFill>
-                        <a:schemeClr val="lt1"/>
-                      </a:solidFill>
-                      <a:prstDash val="solid"/>
-                      <a:round/>
-                      <a:headEnd type="none" w="sm" len="sm"/>
-                      <a:tailEnd type="none" w="sm" len="sm"/>
-                    </a:lnR>
-                    <a:lnT w="12700" cap="flat" cmpd="sng">
-                      <a:solidFill>
-                        <a:schemeClr val="lt1"/>
-                      </a:solidFill>
-                      <a:prstDash val="solid"/>
-                      <a:round/>
-                      <a:headEnd type="none" w="sm" len="sm"/>
-                      <a:tailEnd type="none" w="sm" len="sm"/>
-                    </a:lnT>
-                    <a:lnB w="12700" cap="flat" cmpd="sng">
-                      <a:solidFill>
-                        <a:schemeClr val="lt1"/>
-                      </a:solidFill>
-                      <a:prstDash val="solid"/>
-                      <a:round/>
-                      <a:headEnd type="none" w="sm" len="sm"/>
-                      <a:tailEnd type="none" w="sm" len="sm"/>
-                    </a:lnB>
-                    <a:solidFill>
-                      <a:srgbClr val="FCE8EA"/>
-                    </a:solidFill>
-                  </a:tcPr>
-                </a:tc>
-                <a:extLst>
-                  <a:ext uri="{0D108BD9-81ED-4DB2-BD59-A6C34878D82A}">
-                    <a16:rowId xmlns:a16="http://schemas.microsoft.com/office/drawing/2014/main" val="10002"/>
-                  </a:ext>
-                </a:extLst>
-              </a:tr>
-            </a:tbl>
-          </a:graphicData>
-        </a:graphic>
-      </p:graphicFrame>
-    </p:spTree>
-  </p:cSld>
-  <p:clrMapOvr>
-    <a:masterClrMapping/>
-  </p:clrMapOvr>
-</p:sld>
-</file>
-
-<file path=ppt/slides/slide8.xml><?xml version="1.0" encoding="utf-8"?>
-<p:sld xmlns:a="http://schemas.openxmlformats.org/drawingml/2006/main" xmlns:r="http://schemas.openxmlformats.org/officeDocument/2006/relationships" xmlns:p="http://schemas.openxmlformats.org/presentationml/2006/main">
-  <p:cSld>
-    <p:spTree>
-      <p:nvGrpSpPr>
-        <p:cNvPr id="1" name="Shape 174"/>
-        <p:cNvGrpSpPr/>
-        <p:nvPr/>
-      </p:nvGrpSpPr>
-      <p:grpSpPr>
-        <a:xfrm>
-          <a:off x="0" y="0"/>
-          <a:ext cx="0" cy="0"/>
-          <a:chOff x="0" y="0"/>
-          <a:chExt cx="0" cy="0"/>
-        </a:xfrm>
-      </p:grpSpPr>
-      <p:sp>
-        <p:nvSpPr>
-          <p:cNvPr id="175" name="Google Shape;175;p10"/>
-          <p:cNvSpPr txBox="1"/>
-          <p:nvPr/>
-        </p:nvSpPr>
-        <p:spPr>
-          <a:xfrm>
-            <a:off x="0" y="6632575"/>
-            <a:ext cx="12192000" cy="225425"/>
-          </a:xfrm>
-          <a:prstGeom prst="rect">
-            <a:avLst/>
-          </a:prstGeom>
-          <a:solidFill>
-            <a:srgbClr val="381850"/>
-          </a:solidFill>
-          <a:ln>
-            <a:noFill/>
-          </a:ln>
-        </p:spPr>
-        <p:txBody>
-          <a:bodyPr spcFirstLastPara="1" wrap="square" lIns="91425" tIns="45700" rIns="91425" bIns="45700" anchor="ctr" anchorCtr="0">
-            <a:noAutofit/>
-          </a:bodyPr>
-          <a:lstStyle/>
-          <a:p>
-            <a:pPr marL="0" marR="0" lvl="0" indent="0" algn="l" rtl="0">
-              <a:lnSpc>
-                <a:spcPct val="100000"/>
-              </a:lnSpc>
-              <a:spcBef>
-                <a:spcPts val="0"/>
-              </a:spcBef>
-              <a:spcAft>
-                <a:spcPts val="0"/>
-              </a:spcAft>
-              <a:buNone/>
-            </a:pPr>
-            <a:endParaRPr sz="1800" b="0" i="0" u="none">
-              <a:solidFill>
-                <a:schemeClr val="dk1"/>
-              </a:solidFill>
-              <a:latin typeface="Arial"/>
-              <a:ea typeface="Arial"/>
-              <a:cs typeface="Arial"/>
-              <a:sym typeface="Arial"/>
-            </a:endParaRPr>
-          </a:p>
-        </p:txBody>
-      </p:sp>
-      <p:sp>
-        <p:nvSpPr>
-          <p:cNvPr id="176" name="Google Shape;176;p10"/>
-          <p:cNvSpPr txBox="1"/>
-          <p:nvPr/>
-        </p:nvSpPr>
-        <p:spPr>
-          <a:xfrm>
-            <a:off x="3509962" y="-6350"/>
-            <a:ext cx="5172075" cy="128587"/>
-          </a:xfrm>
-          <a:prstGeom prst="rect">
-            <a:avLst/>
-          </a:prstGeom>
-          <a:solidFill>
-            <a:srgbClr val="381850"/>
-          </a:solidFill>
-          <a:ln>
-            <a:noFill/>
-          </a:ln>
-        </p:spPr>
-        <p:txBody>
-          <a:bodyPr spcFirstLastPara="1" wrap="square" lIns="91425" tIns="45700" rIns="91425" bIns="45700" anchor="ctr" anchorCtr="0">
-            <a:noAutofit/>
-          </a:bodyPr>
-          <a:lstStyle/>
-          <a:p>
-            <a:pPr marL="0" marR="0" lvl="0" indent="0" algn="l" rtl="0">
-              <a:lnSpc>
-                <a:spcPct val="100000"/>
-              </a:lnSpc>
-              <a:spcBef>
-                <a:spcPts val="0"/>
-              </a:spcBef>
-              <a:spcAft>
-                <a:spcPts val="0"/>
-              </a:spcAft>
-              <a:buNone/>
-            </a:pPr>
-            <a:endParaRPr sz="1800" b="0" i="0" u="none">
-              <a:solidFill>
-                <a:schemeClr val="dk1"/>
-              </a:solidFill>
-              <a:latin typeface="Arial"/>
-              <a:ea typeface="Arial"/>
-              <a:cs typeface="Arial"/>
-              <a:sym typeface="Arial"/>
-            </a:endParaRPr>
-          </a:p>
-        </p:txBody>
-      </p:sp>
-      <p:sp>
-        <p:nvSpPr>
-          <p:cNvPr id="177" name="Google Shape;177;p10"/>
-          <p:cNvSpPr txBox="1"/>
-          <p:nvPr/>
-        </p:nvSpPr>
-        <p:spPr>
-          <a:xfrm>
-            <a:off x="992187" y="382587"/>
-            <a:ext cx="10207625" cy="584200"/>
-          </a:xfrm>
-          <a:prstGeom prst="rect">
-            <a:avLst/>
-          </a:prstGeom>
-          <a:noFill/>
-          <a:ln>
-            <a:noFill/>
-          </a:ln>
-        </p:spPr>
-        <p:txBody>
-          <a:bodyPr spcFirstLastPara="1" wrap="square" lIns="91425" tIns="45700" rIns="91425" bIns="45700" anchor="t" anchorCtr="0">
-            <a:spAutoFit/>
-          </a:bodyPr>
-          <a:lstStyle/>
-          <a:p>
-            <a:pPr marL="0" marR="0" lvl="0" indent="0" algn="ctr" rtl="0">
-              <a:lnSpc>
-                <a:spcPct val="100000"/>
-              </a:lnSpc>
-              <a:spcBef>
-                <a:spcPts val="0"/>
-              </a:spcBef>
-              <a:spcAft>
-                <a:spcPts val="0"/>
-              </a:spcAft>
-              <a:buClr>
-                <a:schemeClr val="dk1"/>
-              </a:buClr>
-              <a:buSzPts val="3200"/>
-              <a:buFont typeface="Georgia"/>
-              <a:buNone/>
-            </a:pPr>
-            <a:r>
-              <a:rPr lang="en-US" sz="3200" b="0" i="0" u="none" dirty="0">
-                <a:solidFill>
-                  <a:schemeClr val="dk1"/>
-                </a:solidFill>
-                <a:latin typeface="Georgia"/>
-                <a:ea typeface="Georgia"/>
-                <a:cs typeface="Georgia"/>
-                <a:sym typeface="Georgia"/>
-              </a:rPr>
-              <a:t>PROPOSED BLOCK DIAGRAM</a:t>
-            </a:r>
-            <a:endParaRPr dirty="0"/>
-          </a:p>
-        </p:txBody>
-      </p:sp>
-      <p:pic>
-        <p:nvPicPr>
-          <p:cNvPr id="3" name="Picture 2">
-            <a:extLst>
-              <a:ext uri="{FF2B5EF4-FFF2-40B4-BE49-F238E27FC236}">
-                <a16:creationId xmlns:a16="http://schemas.microsoft.com/office/drawing/2014/main" id="{0E25EAB6-CB01-526A-5C12-F7AB708CF889}"/>
-              </a:ext>
-            </a:extLst>
-          </p:cNvPr>
-          <p:cNvPicPr>
-            <a:picLocks noChangeAspect="1"/>
-          </p:cNvPicPr>
-          <p:nvPr/>
-        </p:nvPicPr>
-        <p:blipFill>
-          <a:blip r:embed="rId3"/>
-          <a:stretch>
-            <a:fillRect/>
-          </a:stretch>
-        </p:blipFill>
-        <p:spPr>
-          <a:xfrm>
-            <a:off x="4360864" y="921802"/>
-            <a:ext cx="3898233" cy="5478998"/>
-          </a:xfrm>
-          <a:prstGeom prst="rect">
-            <a:avLst/>
-          </a:prstGeom>
-        </p:spPr>
-      </p:pic>
-    </p:spTree>
-  </p:cSld>
-  <p:clrMapOvr>
-    <a:masterClrMapping/>
-  </p:clrMapOvr>
-</p:sld>
-</file>
-
-<file path=ppt/slides/slide9.xml><?xml version="1.0" encoding="utf-8"?>
-<p:sld xmlns:a="http://schemas.openxmlformats.org/drawingml/2006/main" xmlns:r="http://schemas.openxmlformats.org/officeDocument/2006/relationships" xmlns:p="http://schemas.openxmlformats.org/presentationml/2006/main">
-  <p:cSld>
-    <p:spTree>
-      <p:nvGrpSpPr>
-        <p:cNvPr id="1" name="Shape 182"/>
-        <p:cNvGrpSpPr/>
-        <p:nvPr/>
-      </p:nvGrpSpPr>
-      <p:grpSpPr>
-        <a:xfrm>
-          <a:off x="0" y="0"/>
-          <a:ext cx="0" cy="0"/>
-          <a:chOff x="0" y="0"/>
-          <a:chExt cx="0" cy="0"/>
-        </a:xfrm>
-      </p:grpSpPr>
-      <p:sp>
-        <p:nvSpPr>
-          <p:cNvPr id="183" name="Google Shape;183;p11"/>
-          <p:cNvSpPr txBox="1">
-            <a:spLocks noGrp="1"/>
-          </p:cNvSpPr>
-          <p:nvPr>
-            <p:ph type="body" idx="1"/>
-          </p:nvPr>
-        </p:nvSpPr>
-        <p:spPr>
-          <a:xfrm>
-            <a:off x="350075" y="3703214"/>
-            <a:ext cx="11360400" cy="847371"/>
-          </a:xfrm>
-          <a:prstGeom prst="rect">
-            <a:avLst/>
-          </a:prstGeom>
-          <a:noFill/>
-          <a:ln>
-            <a:noFill/>
-          </a:ln>
-        </p:spPr>
-        <p:txBody>
-          <a:bodyPr spcFirstLastPara="1" wrap="square" lIns="91425" tIns="45700" rIns="91425" bIns="45700" anchor="ctr" anchorCtr="0">
-            <a:spAutoFit/>
-          </a:bodyPr>
-          <a:lstStyle/>
-          <a:p>
-            <a:pPr marL="228600" lvl="0" indent="-114300" algn="just" rtl="0">
-              <a:spcBef>
-                <a:spcPts val="1000"/>
-              </a:spcBef>
-              <a:spcAft>
-                <a:spcPts val="0"/>
-              </a:spcAft>
-              <a:buClr>
-                <a:schemeClr val="dk1"/>
-              </a:buClr>
-              <a:buSzPts val="1100"/>
-              <a:buFont typeface="Arial"/>
-              <a:buNone/>
-            </a:pPr>
-            <a:endParaRPr sz="1800" dirty="0">
-              <a:latin typeface="Times New Roman"/>
-              <a:ea typeface="Times New Roman"/>
-              <a:cs typeface="Times New Roman"/>
-              <a:sym typeface="Times New Roman"/>
-            </a:endParaRPr>
-          </a:p>
-          <a:p>
-            <a:pPr marL="228600" marR="0" lvl="0" indent="-114300" algn="l" rtl="0">
-              <a:lnSpc>
-                <a:spcPct val="90000"/>
-              </a:lnSpc>
-              <a:spcBef>
-                <a:spcPts val="1000"/>
-              </a:spcBef>
-              <a:spcAft>
-                <a:spcPts val="0"/>
-              </a:spcAft>
-              <a:buClr>
-                <a:schemeClr val="dk1"/>
-              </a:buClr>
-              <a:buSzPts val="1800"/>
-              <a:buFont typeface="Arial"/>
-              <a:buNone/>
-            </a:pPr>
-            <a:endParaRPr sz="1800" b="1" dirty="0">
-              <a:latin typeface="Times New Roman"/>
-              <a:ea typeface="Times New Roman"/>
-              <a:cs typeface="Times New Roman"/>
-              <a:sym typeface="Times New Roman"/>
-            </a:endParaRPr>
-          </a:p>
-        </p:txBody>
-      </p:sp>
-      <p:sp>
-        <p:nvSpPr>
-          <p:cNvPr id="184" name="Google Shape;184;p11"/>
-          <p:cNvSpPr txBox="1"/>
-          <p:nvPr/>
-        </p:nvSpPr>
-        <p:spPr>
-          <a:xfrm>
-            <a:off x="2649125" y="547062"/>
-            <a:ext cx="9398100" cy="716100"/>
-          </a:xfrm>
-          <a:prstGeom prst="rect">
-            <a:avLst/>
-          </a:prstGeom>
-          <a:noFill/>
-          <a:ln>
-            <a:noFill/>
-          </a:ln>
-        </p:spPr>
-        <p:txBody>
-          <a:bodyPr spcFirstLastPara="1" wrap="square" lIns="91425" tIns="45700" rIns="91425" bIns="45700" anchor="ctr" anchorCtr="0">
-            <a:noAutofit/>
-          </a:bodyPr>
-          <a:lstStyle/>
-          <a:p>
-            <a:pPr marL="0" marR="0" lvl="0" indent="0" algn="l" rtl="0">
-              <a:lnSpc>
-                <a:spcPct val="90000"/>
-              </a:lnSpc>
-              <a:spcBef>
-                <a:spcPts val="0"/>
-              </a:spcBef>
-              <a:spcAft>
-                <a:spcPts val="0"/>
-              </a:spcAft>
-              <a:buClr>
-                <a:schemeClr val="dk1"/>
-              </a:buClr>
-              <a:buSzPts val="3200"/>
-              <a:buFont typeface="Georgia"/>
-              <a:buNone/>
-            </a:pPr>
-            <a:r>
-              <a:rPr lang="en-US" sz="3200" b="0" i="0" u="none">
-                <a:solidFill>
-                  <a:schemeClr val="dk1"/>
-                </a:solidFill>
-                <a:latin typeface="Georgia"/>
-                <a:ea typeface="Georgia"/>
-                <a:cs typeface="Georgia"/>
-                <a:sym typeface="Georgia"/>
-              </a:rPr>
-              <a:t>DETAILS OF PROPOSED SYSTEM</a:t>
-            </a:r>
-            <a:endParaRPr/>
-          </a:p>
-        </p:txBody>
-      </p:sp>
-      <p:sp>
-        <p:nvSpPr>
-          <p:cNvPr id="3" name="TextBox 2">
-            <a:extLst>
-              <a:ext uri="{FF2B5EF4-FFF2-40B4-BE49-F238E27FC236}">
-                <a16:creationId xmlns:a16="http://schemas.microsoft.com/office/drawing/2014/main" id="{D6BF4FD6-3248-AD7B-7015-FDBE1B8BAD9D}"/>
-              </a:ext>
-            </a:extLst>
-          </p:cNvPr>
-          <p:cNvSpPr txBox="1"/>
-          <p:nvPr/>
-        </p:nvSpPr>
-        <p:spPr>
-          <a:xfrm>
-            <a:off x="946483" y="1459832"/>
-            <a:ext cx="9529011" cy="4524315"/>
-          </a:xfrm>
-          <a:prstGeom prst="rect">
-            <a:avLst/>
-          </a:prstGeom>
-          <a:noFill/>
-        </p:spPr>
-        <p:txBody>
-          <a:bodyPr wrap="square">
-            <a:spAutoFit/>
-          </a:bodyPr>
-          <a:lstStyle/>
-          <a:p>
-            <a:pPr>
-              <a:buNone/>
-            </a:pPr>
-            <a:r>
-              <a:rPr lang="en-IN" sz="2400" b="1" dirty="0"/>
-              <a:t>Physical Elevator Prototype</a:t>
-            </a:r>
-          </a:p>
-          <a:p>
-            <a:pPr>
-              <a:buNone/>
-            </a:pPr>
-            <a:r>
-              <a:rPr lang="en-IN" sz="2400" dirty="0"/>
-              <a:t>A small-scale elevator model will be constructed using low-cost materials. A DC geared motor will control the movement of the elevator cabin between floors.</a:t>
-            </a:r>
-          </a:p>
-          <a:p>
-            <a:pPr>
-              <a:buNone/>
-            </a:pPr>
-            <a:endParaRPr lang="en-IN" sz="2400" dirty="0"/>
-          </a:p>
-          <a:p>
-            <a:pPr>
-              <a:buNone/>
-            </a:pPr>
-            <a:r>
-              <a:rPr lang="en-IN" sz="2400" b="1" dirty="0"/>
-              <a:t>Sensor Module</a:t>
-            </a:r>
-          </a:p>
-          <a:p>
-            <a:pPr>
-              <a:buNone/>
-            </a:pPr>
-            <a:r>
-              <a:rPr lang="en-IN" sz="2400" dirty="0"/>
-              <a:t>Sensors will continuously collect elevator operating parameters:</a:t>
-            </a:r>
-          </a:p>
-          <a:p>
-            <a:pPr marL="342900" lvl="0" indent="-342900">
-              <a:buFont typeface="Arial" panose="020B0604020202020204" pitchFamily="34" charset="0"/>
-              <a:buChar char="•"/>
-            </a:pPr>
-            <a:r>
-              <a:rPr lang="en-IN" sz="2400" b="1" dirty="0"/>
-              <a:t>Vibration sensor</a:t>
-            </a:r>
-            <a:r>
-              <a:rPr lang="en-IN" sz="2400" dirty="0"/>
-              <a:t> → detects abnormal vibration </a:t>
-            </a:r>
-          </a:p>
-          <a:p>
-            <a:pPr marL="342900" lvl="0" indent="-342900">
-              <a:buFont typeface="Arial" panose="020B0604020202020204" pitchFamily="34" charset="0"/>
-              <a:buChar char="•"/>
-            </a:pPr>
-            <a:r>
-              <a:rPr lang="en-IN" sz="2400" b="1" dirty="0"/>
-              <a:t>Temperature sensor</a:t>
-            </a:r>
-            <a:r>
-              <a:rPr lang="en-IN" sz="2400" dirty="0"/>
-              <a:t> → monitors overheating </a:t>
-            </a:r>
-          </a:p>
-          <a:p>
-            <a:pPr marL="342900" lvl="0" indent="-342900">
-              <a:buFont typeface="Arial" panose="020B0604020202020204" pitchFamily="34" charset="0"/>
-              <a:buChar char="•"/>
-            </a:pPr>
-            <a:r>
-              <a:rPr lang="en-IN" sz="2400" b="1" dirty="0"/>
-              <a:t>IR sensor</a:t>
-            </a:r>
-            <a:r>
-              <a:rPr lang="en-IN" sz="2400" dirty="0"/>
-              <a:t> → detects floor position </a:t>
-            </a:r>
-          </a:p>
-          <a:p>
-            <a:pPr marL="342900" lvl="0" indent="-342900">
-              <a:buFont typeface="Arial" panose="020B0604020202020204" pitchFamily="34" charset="0"/>
-              <a:buChar char="•"/>
-            </a:pPr>
-            <a:r>
-              <a:rPr lang="en-IN" sz="2400" b="1" dirty="0"/>
-              <a:t>IR obstacle sensor</a:t>
-            </a:r>
-            <a:r>
-              <a:rPr lang="en-IN" sz="2400" dirty="0"/>
-              <a:t> → detects door obstruction </a:t>
-            </a:r>
-          </a:p>
-          <a:p>
-            <a:pPr marL="342900" lvl="0" indent="-342900">
-              <a:buFont typeface="Arial" panose="020B0604020202020204" pitchFamily="34" charset="0"/>
-              <a:buChar char="•"/>
-            </a:pPr>
-            <a:r>
-              <a:rPr lang="en-IN" sz="2400" b="1" dirty="0"/>
-              <a:t>Optional current sensor</a:t>
-            </a:r>
-            <a:r>
-              <a:rPr lang="en-IN" sz="2400" dirty="0"/>
-              <a:t> → monitors motor current </a:t>
-            </a:r>
-          </a:p>
-        </p:txBody>
-      </p:sp>
-    </p:spTree>
-  </p:cSld>
-  <p:clrMapOvr>
-    <a:masterClrMapping/>
-  </p:clrMapOvr>
-</p:sld>
-</file>
-
 <file path=ppt/theme/theme1.xml><?xml version="1.0" encoding="utf-8"?>
 <a:theme xmlns:a="http://schemas.openxmlformats.org/drawingml/2006/main" name="Office Theme">
   <a:themeElements>
